--- a/presentation/mid_presentation_OpenPowerlifting.pptx
+++ b/presentation/mid_presentation_OpenPowerlifting.pptx
@@ -3334,7 +3334,7 @@
                 </a:solidFill>
                 <a:latin typeface="Arial"/>
               </a:rPr>
-              <a:t>•  היקף: כ-3.94 מיליון תוצאות (שורה לכל מתחרה בכל תחרות), 41 משתנים.</a:t>
+              <a:t>•  היקף: כ-3.94 מיליון תוצאות (שורה לכל מתחרה בכל תחרות), 42 משתנים.</a:t>
             </a:r>
           </a:p>
           <a:p>
@@ -3350,7 +3350,23 @@
                 </a:solidFill>
                 <a:latin typeface="Arial"/>
               </a:rPr>
-              <a:t>•  משתנים: רציפים - משקל-גוף, משקלי-ניסיון, Total, Dots; קטגוריים - מין, ציוד, פדרציה, מקטע-משקל, Tested.</a:t>
+              <a:t>•  משתנים: רציפים - משקל-גוף, משקלי-ניסיון, Total (סכום שלוש ההרמות), Dots (ציון כוח מנורמל); קטגוריים - מין, ציוד, פדרציה, מקטע-משקל, Tested (תחרות עם בדיקות סמים).</a:t>
+            </a:r>
+          </a:p>
+          <a:p>
+            <a:pPr rtl="1" algn="r">
+              <a:spcAft>
+                <a:spcPts val="1200"/>
+              </a:spcAft>
+            </a:pPr>
+            <a:r>
+              <a:rPr sz="1900" b="0">
+                <a:solidFill>
+                  <a:srgbClr val="222222"/>
+                </a:solidFill>
+                <a:latin typeface="Arial"/>
+              </a:rPr>
+              <a:t>•  אתגרים בדאטה: אותו מתחרה מופיע בתחרויות רבות (תלות בין שורות), הבדלי סכמות בין פדרציות, והמרות lb→kg.</a:t>
             </a:r>
           </a:p>
           <a:p>
@@ -3522,6 +3538,22 @@
                 </a:solidFill>
                 <a:latin typeface="Arial"/>
               </a:rPr>
+              <a:t>•  רקע קצר: בהרמת-כוח שלוש הרמות (סקוואט, בנץ'-פרס, דדליפט), שלושה ניסיונות לכל הרמה, והתחרות נערכת בתוך מקטעי משקל-גוף.</a:t>
+            </a:r>
+          </a:p>
+          <a:p>
+            <a:pPr rtl="1" algn="r">
+              <a:spcAft>
+                <a:spcPts val="1200"/>
+              </a:spcAft>
+            </a:pPr>
+            <a:r>
+              <a:rPr sz="1900" b="0">
+                <a:solidFill>
+                  <a:srgbClr val="222222"/>
+                </a:solidFill>
+                <a:latin typeface="Arial"/>
+              </a:rPr>
               <a:t>•  מתחרה שולט בשני מספרים בלבד: המשקל על המוט (בחירת הניסיונות) ומשקל הגוף (בשקילה).</a:t>
             </a:r>
           </a:p>
@@ -3898,7 +3930,7 @@
                 </a:solidFill>
                 <a:latin typeface="Arial"/>
               </a:rPr>
-              <a:t>•  H1 (רשת המשקלים): מודל נראות עם עיגול-רשת (rounded-likelihood MLE) + מבחן יחס-נראות מקונן (GLRT).</a:t>
+              <a:t>•  H1 (רשת המשקלים): מודל נראות עם עיגול-רשת (rounded-likelihood MLE) + מבחן יחס-נראות מוכלל (GLRT) למודלים מקוננים.</a:t>
             </a:r>
           </a:p>
           <a:p>
@@ -4250,7 +4282,7 @@
                 </a:solidFill>
                 <a:latin typeface="Arial"/>
               </a:rPr>
-              <a:t>מתחת לסף 83 ק"ג (מחלקת IPF) הצטברות בולטת (יחס-לוג +1.92, שורד ניקוי מספרים-עגולים); בנקודת-בקרה שאינה סף (91 ק"ג) אין עודף (≈ -0.21). אינדיקציה ראשונית לחיתוך-משקל; אישוש פורמלי (McCrary, de-heaping) בהמשך.</a:t>
+              <a:t>מתחת לסף 83 ק"ג (מחלקת IPF; גברים, IPF+USAPL) הצטברות בולטת (יחס-לוג +1.92, שורד ניקוי מספרים-עגולים); בנקודת-בקרה שאינה סף (91 ק"ג) אין עודף (≈ -0.21). אינדיקציה ראשונית לחיתוך-משקל; מבחן McCrary פורמלי בהמשך.</a:t>
             </a:r>
           </a:p>
         </p:txBody>
@@ -4610,7 +4642,7 @@
                 </a:solidFill>
                 <a:latin typeface="Arial"/>
               </a:rPr>
-              <a:t>•  הצעדים הבאים: מבחן McCrary פורמלי + de-heaping, מבנה התפלגות הכוח, ואומדן תקרת-כוח (EVT).</a:t>
+              <a:t>•  הצעדים הבאים: מבחן McCrary פורמלי + בדיקות הפרכה מלאות (פלצבו, מינון-תגובה), מבנה התפלגות הכוח, ואומדן תקרת-כוח (EVT).</a:t>
             </a:r>
           </a:p>
           <a:p>

--- a/presentation/mid_presentation_OpenPowerlifting.pptx
+++ b/presentation/mid_presentation_OpenPowerlifting.pptx
@@ -3098,14 +3098,58 @@
       <p:grpSpPr/>
       <p:sp>
         <p:nvSpPr>
-          <p:cNvPr id="2" name="TextBox 1"/>
+          <p:cNvPr id="2" name="Rectangle 1"/>
+          <p:cNvSpPr/>
+          <p:nvPr/>
+        </p:nvSpPr>
+        <p:spPr>
+          <a:xfrm>
+            <a:off x="0" y="0"/>
+            <a:ext cx="12191695" cy="502920"/>
+          </a:xfrm>
+          <a:prstGeom prst="rect">
+            <a:avLst/>
+          </a:prstGeom>
+          <a:solidFill>
+            <a:srgbClr val="1F3864"/>
+          </a:solidFill>
+          <a:ln>
+            <a:noFill/>
+          </a:ln>
+          <a:effectLst/>
+        </p:spPr>
+        <p:style>
+          <a:lnRef idx="1">
+            <a:schemeClr val="accent1"/>
+          </a:lnRef>
+          <a:fillRef idx="3">
+            <a:schemeClr val="accent1"/>
+          </a:fillRef>
+          <a:effectRef idx="2">
+            <a:schemeClr val="accent1"/>
+          </a:effectRef>
+          <a:fontRef idx="minor">
+            <a:schemeClr val="lt1"/>
+          </a:fontRef>
+        </p:style>
+        <p:txBody>
+          <a:bodyPr rtlCol="0" anchor="ctr"/>
+          <a:lstStyle/>
+          <a:p>
+            <a:pPr algn="ctr"/>
+          </a:p>
+        </p:txBody>
+      </p:sp>
+      <p:sp>
+        <p:nvSpPr>
+          <p:cNvPr id="3" name="TextBox 2"/>
           <p:cNvSpPr txBox="1"/>
           <p:nvPr/>
         </p:nvSpPr>
         <p:spPr>
           <a:xfrm>
-            <a:off x="914400" y="1828800"/>
-            <a:ext cx="10360152" cy="3200400"/>
+            <a:off x="914400" y="1737360"/>
+            <a:ext cx="10360152" cy="3657600"/>
           </a:xfrm>
           <a:prstGeom prst="rect">
             <a:avLst/>
@@ -3113,18 +3157,18 @@
           <a:noFill/>
         </p:spPr>
         <p:txBody>
-          <a:bodyPr wrap="square" anchor="ctr">
+          <a:bodyPr wrap="square" anchor="t">
             <a:spAutoFit/>
           </a:bodyPr>
           <a:lstStyle/>
           <a:p>
             <a:pPr rtl="1" algn="ctr">
               <a:spcAft>
-                <a:spcPts val="1400"/>
+                <a:spcPts val="1000"/>
               </a:spcAft>
             </a:pPr>
             <a:r>
-              <a:rPr sz="4000" b="1">
+              <a:rPr sz="3800" b="1">
                 <a:solidFill>
                   <a:srgbClr val="1F3864"/>
                 </a:solidFill>
@@ -3136,17 +3180,33 @@
           <a:p>
             <a:pPr rtl="1" algn="ctr">
               <a:spcAft>
-                <a:spcPts val="2800"/>
+                <a:spcPts val="2200"/>
               </a:spcAft>
             </a:pPr>
             <a:r>
-              <a:rPr sz="2000" b="0">
-                <a:solidFill>
-                  <a:srgbClr val="606060"/>
+              <a:rPr sz="1900" b="0">
+                <a:solidFill>
+                  <a:srgbClr val="707070"/>
                 </a:solidFill>
                 <a:latin typeface="Arial"/>
               </a:rPr>
-              <a:t>ניתוח סטטיסטי של OpenPowerlifting - ומה הנתונים חושפים על גבולות הכוח באוכלוסיית המתחרים</a:t>
+              <a:t>ניתוח סטטיסטי של OpenPowerlifting — מה הנתונים חושפים על גבולות הכוח</a:t>
+            </a:r>
+          </a:p>
+          <a:p>
+            <a:pPr rtl="1" algn="ctr">
+              <a:spcAft>
+                <a:spcPts val="2600"/>
+              </a:spcAft>
+            </a:pPr>
+            <a:r>
+              <a:rPr sz="2100" b="1">
+                <a:solidFill>
+                  <a:srgbClr val="C0531B"/>
+                </a:solidFill>
+                <a:latin typeface="Arial"/>
+              </a:rPr>
+              <a:t>96.2% מ-13.4 מיליון ניסיונות נופלים בדיוק על רשת 2.5 ק"ג</a:t>
             </a:r>
           </a:p>
           <a:p>
@@ -3172,14 +3232,58 @@
               </a:spcAft>
             </a:pPr>
             <a:r>
-              <a:rPr sz="1700" b="0">
-                <a:solidFill>
-                  <a:srgbClr val="606060"/>
+              <a:rPr sz="1600" b="0">
+                <a:solidFill>
+                  <a:srgbClr val="707070"/>
                 </a:solidFill>
                 <a:latin typeface="Arial"/>
               </a:rPr>
-              <a:t>תאוריה סטטיסטית · פרויקט סוף - מצגת אמצע</a:t>
-            </a:r>
+              <a:t>תאוריה סטטיסטית · פרויקט סוף — מצגת אמצע</a:t>
+            </a:r>
+          </a:p>
+        </p:txBody>
+      </p:sp>
+      <p:sp>
+        <p:nvSpPr>
+          <p:cNvPr id="4" name="Rectangle 3"/>
+          <p:cNvSpPr/>
+          <p:nvPr/>
+        </p:nvSpPr>
+        <p:spPr>
+          <a:xfrm>
+            <a:off x="4023360" y="5532120"/>
+            <a:ext cx="4114800" cy="41148"/>
+          </a:xfrm>
+          <a:prstGeom prst="rect">
+            <a:avLst/>
+          </a:prstGeom>
+          <a:solidFill>
+            <a:srgbClr val="2E86C1"/>
+          </a:solidFill>
+          <a:ln>
+            <a:noFill/>
+          </a:ln>
+          <a:effectLst/>
+        </p:spPr>
+        <p:style>
+          <a:lnRef idx="1">
+            <a:schemeClr val="accent1"/>
+          </a:lnRef>
+          <a:fillRef idx="3">
+            <a:schemeClr val="accent1"/>
+          </a:fillRef>
+          <a:effectRef idx="2">
+            <a:schemeClr val="accent1"/>
+          </a:effectRef>
+          <a:fontRef idx="minor">
+            <a:schemeClr val="lt1"/>
+          </a:fontRef>
+        </p:style>
+        <p:txBody>
+          <a:bodyPr rtlCol="0" anchor="ctr"/>
+          <a:lstStyle/>
+          <a:p>
+            <a:pPr algn="ctr"/>
           </a:p>
         </p:txBody>
       </p:sp>
@@ -3292,8 +3396,8 @@
         </p:nvSpPr>
         <p:spPr>
           <a:xfrm>
-            <a:off x="548640" y="1600200"/>
-            <a:ext cx="11091672" cy="4846320"/>
+            <a:off x="548640" y="6473952"/>
+            <a:ext cx="11091672" cy="274320"/>
           </a:xfrm>
           <a:prstGeom prst="rect">
             <a:avLst/>
@@ -3308,27 +3412,66 @@
           <a:p>
             <a:pPr rtl="1" algn="r">
               <a:spcAft>
-                <a:spcPts val="1200"/>
+                <a:spcPts val="0"/>
               </a:spcAft>
             </a:pPr>
             <a:r>
-              <a:rPr sz="1900" b="0">
-                <a:solidFill>
-                  <a:srgbClr val="222222"/>
+              <a:rPr sz="900" b="0">
+                <a:solidFill>
+                  <a:srgbClr val="707070"/>
                 </a:solidFill>
                 <a:latin typeface="Arial"/>
               </a:rPr>
-              <a:t>•  מקור: OpenPowerlifting - מאגר פתוח של תוצאות תחרויות הרמת-כוח (רישיון CC0).</a:t>
-            </a:r>
-          </a:p>
+              <a:t>תאוריה סטטיסטית · פרויקט סוף · OpenPowerlifting · 2/9</a:t>
+            </a:r>
+          </a:p>
+        </p:txBody>
+      </p:sp>
+      <p:sp>
+        <p:nvSpPr>
+          <p:cNvPr id="5" name="TextBox 4"/>
+          <p:cNvSpPr txBox="1"/>
+          <p:nvPr/>
+        </p:nvSpPr>
+        <p:spPr>
+          <a:xfrm>
+            <a:off x="548640" y="1645920"/>
+            <a:ext cx="11091672" cy="4572000"/>
+          </a:xfrm>
+          <a:prstGeom prst="rect">
+            <a:avLst/>
+          </a:prstGeom>
+          <a:noFill/>
+        </p:spPr>
+        <p:txBody>
+          <a:bodyPr wrap="square" anchor="t">
+            <a:spAutoFit/>
+          </a:bodyPr>
+          <a:lstStyle/>
           <a:p>
             <a:pPr rtl="1" algn="r">
               <a:spcAft>
-                <a:spcPts val="1200"/>
+                <a:spcPts val="1400"/>
               </a:spcAft>
             </a:pPr>
             <a:r>
-              <a:rPr sz="1900" b="0">
+              <a:rPr sz="1950" b="0">
+                <a:solidFill>
+                  <a:srgbClr val="222222"/>
+                </a:solidFill>
+                <a:latin typeface="Arial"/>
+              </a:rPr>
+              <a:t>•  מקור: OpenPowerlifting — מאגר פתוח של תוצאות תחרויות הרמת-כוח (רישיון CC0).</a:t>
+            </a:r>
+          </a:p>
+          <a:p>
+            <a:pPr rtl="1" algn="r">
+              <a:spcAft>
+                <a:spcPts val="1400"/>
+              </a:spcAft>
+            </a:pPr>
+            <a:r>
+              <a:rPr sz="1950" b="0">
                 <a:solidFill>
                   <a:srgbClr val="222222"/>
                 </a:solidFill>
@@ -3340,49 +3483,33 @@
           <a:p>
             <a:pPr rtl="1" algn="r">
               <a:spcAft>
-                <a:spcPts val="1200"/>
+                <a:spcPts val="1400"/>
               </a:spcAft>
             </a:pPr>
             <a:r>
-              <a:rPr sz="1900" b="0">
+              <a:rPr sz="1950" b="0">
                 <a:solidFill>
                   <a:srgbClr val="222222"/>
                 </a:solidFill>
                 <a:latin typeface="Arial"/>
               </a:rPr>
-              <a:t>•  משתנים: רציפים - משקל-גוף, משקלי-ניסיון, Total (סכום שלוש ההרמות), Dots (ציון כוח מנורמל); קטגוריים - מין, ציוד, פדרציה, מקטע-משקל, Tested (תחרות עם בדיקות סמים).</a:t>
+              <a:t>•  משתנים: רציפים — משקל-גוף, משקלי-ניסיון, Total, Dots; קטגוריים — מין, ציוד, פדרציה, מקטע-משקל, Tested.</a:t>
             </a:r>
           </a:p>
           <a:p>
             <a:pPr rtl="1" algn="r">
               <a:spcAft>
-                <a:spcPts val="1200"/>
+                <a:spcPts val="1400"/>
               </a:spcAft>
             </a:pPr>
             <a:r>
-              <a:rPr sz="1900" b="0">
+              <a:rPr sz="1950" b="0">
                 <a:solidFill>
                   <a:srgbClr val="222222"/>
                 </a:solidFill>
                 <a:latin typeface="Arial"/>
               </a:rPr>
-              <a:t>•  אתגרים בדאטה: אותו מתחרה מופיע בתחרויות רבות (תלות בין שורות), הבדלי סכמות בין פדרציות, והמרות lb→kg.</a:t>
-            </a:r>
-          </a:p>
-          <a:p>
-            <a:pPr rtl="1" algn="r">
-              <a:spcAft>
-                <a:spcPts val="1200"/>
-              </a:spcAft>
-            </a:pPr>
-            <a:r>
-              <a:rPr sz="1900" b="0">
-                <a:solidFill>
-                  <a:srgbClr val="222222"/>
-                </a:solidFill>
-                <a:latin typeface="Arial"/>
-              </a:rPr>
-              <a:t>•  הנתונים כבר הורדו ועובדו - כל המספרים בהמשך הם תוצאות אמת ראשוניות.</a:t>
+              <a:t>•  ניקוי ושחזור: אותו מתחרה מופיע בכמה תחרויות (תלות בין שורות) → dedup לפי-מתחרה; עותק-נתונים נעול לשחזור מלא.</a:t>
             </a:r>
           </a:p>
         </p:txBody>
@@ -3496,8 +3623,8 @@
         </p:nvSpPr>
         <p:spPr>
           <a:xfrm>
-            <a:off x="548640" y="1600200"/>
-            <a:ext cx="11091672" cy="4846320"/>
+            <a:off x="548640" y="6473952"/>
+            <a:ext cx="11091672" cy="274320"/>
           </a:xfrm>
           <a:prstGeom prst="rect">
             <a:avLst/>
@@ -3512,65 +3639,104 @@
           <a:p>
             <a:pPr rtl="1" algn="r">
               <a:spcAft>
-                <a:spcPts val="1600"/>
+                <a:spcPts val="0"/>
               </a:spcAft>
             </a:pPr>
             <a:r>
-              <a:rPr sz="2200" b="1">
-                <a:solidFill>
-                  <a:srgbClr val="2E86C1"/>
+              <a:rPr sz="900" b="0">
+                <a:solidFill>
+                  <a:srgbClr val="707070"/>
                 </a:solidFill>
                 <a:latin typeface="Arial"/>
               </a:rPr>
-              <a:t>הרעיון: שני המספרים שהמתחרה שולט בהם - והמחיר שהוא משלם עליהם</a:t>
-            </a:r>
-          </a:p>
+              <a:t>תאוריה סטטיסטית · פרויקט סוף · OpenPowerlifting · 3/9</a:t>
+            </a:r>
+          </a:p>
+        </p:txBody>
+      </p:sp>
+      <p:sp>
+        <p:nvSpPr>
+          <p:cNvPr id="5" name="TextBox 4"/>
+          <p:cNvSpPr txBox="1"/>
+          <p:nvPr/>
+        </p:nvSpPr>
+        <p:spPr>
+          <a:xfrm>
+            <a:off x="548640" y="1645920"/>
+            <a:ext cx="11091672" cy="4572000"/>
+          </a:xfrm>
+          <a:prstGeom prst="rect">
+            <a:avLst/>
+          </a:prstGeom>
+          <a:noFill/>
+        </p:spPr>
+        <p:txBody>
+          <a:bodyPr wrap="square" anchor="t">
+            <a:spAutoFit/>
+          </a:bodyPr>
+          <a:lstStyle/>
           <a:p>
             <a:pPr rtl="1" algn="r">
               <a:spcAft>
-                <a:spcPts val="1200"/>
+                <a:spcPts val="1800"/>
               </a:spcAft>
             </a:pPr>
             <a:r>
-              <a:rPr sz="1900" b="0">
-                <a:solidFill>
-                  <a:srgbClr val="222222"/>
+              <a:rPr sz="2200" b="1">
+                <a:solidFill>
+                  <a:srgbClr val="2E86C1"/>
                 </a:solidFill>
                 <a:latin typeface="Arial"/>
               </a:rPr>
-              <a:t>•  רקע קצר: בהרמת-כוח שלוש הרמות (סקוואט, בנץ'-פרס, דדליפט), שלושה ניסיונות לכל הרמה, והתחרות נערכת בתוך מקטעי משקל-גוף.</a:t>
+              <a:t>הרעיון: שני המספרים שהמתחרה שולט בהם — המוט והמאזניים</a:t>
             </a:r>
           </a:p>
           <a:p>
             <a:pPr rtl="1" algn="r">
               <a:spcAft>
-                <a:spcPts val="1200"/>
+                <a:spcPts val="1400"/>
               </a:spcAft>
             </a:pPr>
             <a:r>
-              <a:rPr sz="1900" b="0">
+              <a:rPr sz="1950" b="0">
                 <a:solidFill>
                   <a:srgbClr val="222222"/>
                 </a:solidFill>
                 <a:latin typeface="Arial"/>
               </a:rPr>
-              <a:t>•  מתחרה שולט בשני מספרים בלבד: המשקל על המוט (בחירת הניסיונות) ומשקל הגוף (בשקילה).</a:t>
+              <a:t>•  רקע: בהרמת-כוח שלוש הרמות (סקוואט, בנץ', דדליפט), שלושה ניסיונות לכל הרמה, והתחרות בתוך מקטעי משקל-גוף.</a:t>
             </a:r>
           </a:p>
           <a:p>
             <a:pPr rtl="1" algn="r">
               <a:spcAft>
-                <a:spcPts val="1200"/>
+                <a:spcPts val="1400"/>
               </a:spcAft>
             </a:pPr>
             <a:r>
-              <a:rPr sz="1900" b="0">
+              <a:rPr sz="1950" b="0">
                 <a:solidFill>
                   <a:srgbClr val="222222"/>
                 </a:solidFill>
                 <a:latin typeface="Arial"/>
               </a:rPr>
-              <a:t>•  אנחנו בוחנים איך הוא "משחק" עם שניהם - ומה ניתן ללמוד מכך על גבולות הכוח באוכלוסיית המתחרים.</a:t>
+              <a:t>•  מתחרה שולט בדיוק בשני מספרים: המשקל על המוט (בחירת ניסיונות) ומשקל הגוף (בשקילה).</a:t>
+            </a:r>
+          </a:p>
+          <a:p>
+            <a:pPr rtl="1" algn="r">
+              <a:spcAft>
+                <a:spcPts val="1400"/>
+              </a:spcAft>
+            </a:pPr>
+            <a:r>
+              <a:rPr sz="1950" b="0">
+                <a:solidFill>
+                  <a:srgbClr val="222222"/>
+                </a:solidFill>
+                <a:latin typeface="Arial"/>
+              </a:rPr>
+              <a:t>•  התרומה: לא רק לתאר — אלא מודל-הסתברות מקורי לרשת-המשקלים, ומבחן-מניפולציה עם נקודת-בקרה ו-de-heaping.</a:t>
             </a:r>
           </a:p>
         </p:txBody>
@@ -3684,8 +3850,8 @@
         </p:nvSpPr>
         <p:spPr>
           <a:xfrm>
-            <a:off x="548640" y="1600200"/>
-            <a:ext cx="11091672" cy="4846320"/>
+            <a:off x="548640" y="6473952"/>
+            <a:ext cx="11091672" cy="274320"/>
           </a:xfrm>
           <a:prstGeom prst="rect">
             <a:avLst/>
@@ -3700,97 +3866,136 @@
           <a:p>
             <a:pPr rtl="1" algn="r">
               <a:spcAft>
-                <a:spcPts val="1200"/>
+                <a:spcPts val="0"/>
               </a:spcAft>
             </a:pPr>
             <a:r>
-              <a:rPr sz="1900" b="0">
-                <a:solidFill>
-                  <a:srgbClr val="222222"/>
+              <a:rPr sz="900" b="0">
+                <a:solidFill>
+                  <a:srgbClr val="707070"/>
                 </a:solidFill>
                 <a:latin typeface="Arial"/>
               </a:rPr>
-              <a:t>•  כיצד מתבטאת בנתונים ההתנהגות ה"מחושבת" של מתחרים - בבחירת המשקל על המוט ובמשקל הגוף?</a:t>
-            </a:r>
-          </a:p>
+              <a:t>תאוריה סטטיסטית · פרויקט סוף · OpenPowerlifting · 4/9</a:t>
+            </a:r>
+          </a:p>
+        </p:txBody>
+      </p:sp>
+      <p:sp>
+        <p:nvSpPr>
+          <p:cNvPr id="5" name="TextBox 4"/>
+          <p:cNvSpPr txBox="1"/>
+          <p:nvPr/>
+        </p:nvSpPr>
+        <p:spPr>
+          <a:xfrm>
+            <a:off x="548640" y="1645920"/>
+            <a:ext cx="11091672" cy="4572000"/>
+          </a:xfrm>
+          <a:prstGeom prst="rect">
+            <a:avLst/>
+          </a:prstGeom>
+          <a:noFill/>
+        </p:spPr>
+        <p:txBody>
+          <a:bodyPr wrap="square" anchor="t">
+            <a:spAutoFit/>
+          </a:bodyPr>
+          <a:lstStyle/>
           <a:p>
             <a:pPr rtl="1" algn="r">
               <a:spcAft>
-                <a:spcPts val="1200"/>
+                <a:spcPts val="1800"/>
               </a:spcAft>
             </a:pPr>
             <a:r>
-              <a:rPr sz="1900" b="0">
-                <a:solidFill>
-                  <a:srgbClr val="222222"/>
+              <a:rPr sz="2200" b="1">
+                <a:solidFill>
+                  <a:srgbClr val="2E86C1"/>
                 </a:solidFill>
                 <a:latin typeface="Arial"/>
               </a:rPr>
-              <a:t>•  ומה ניתן ללמוד מכך (וממגבלות הנתונים) על מבנה הכוח וגבולותיו באוכלוסיית המתחרים?</a:t>
+              <a:t>ארבע השערות, סיפור אחד — "שני המספרים" וגבולות הכוח</a:t>
             </a:r>
           </a:p>
           <a:p>
             <a:pPr rtl="1" algn="r">
               <a:spcAft>
-                <a:spcPts val="1200"/>
+                <a:spcPts val="1400"/>
               </a:spcAft>
             </a:pPr>
             <a:r>
-              <a:rPr sz="1900" b="0">
+              <a:rPr sz="1950" b="0">
                 <a:solidFill>
                   <a:srgbClr val="222222"/>
                 </a:solidFill>
                 <a:latin typeface="Arial"/>
               </a:rPr>
-              <a:t>•  השערות מרכזיות:</a:t>
+              <a:t>•  כיצד מתבטאת בנתונים ההתנהגות ה"מחושבת" של מתחרים — בבחירת המשקל על המוט ובמשקל הגוף?</a:t>
             </a:r>
           </a:p>
           <a:p>
             <a:pPr rtl="1" algn="r">
               <a:spcAft>
-                <a:spcPts val="1200"/>
+                <a:spcPts val="1400"/>
               </a:spcAft>
             </a:pPr>
             <a:r>
-              <a:rPr sz="1700" b="0">
+              <a:rPr sz="1800" b="0">
                 <a:solidFill>
                   <a:srgbClr val="222222"/>
                 </a:solidFill>
                 <a:latin typeface="Arial"/>
               </a:rPr>
-              <a:t>◦  H1 - משקלי הניסיון אינם רציפים אלא נופלים רק על כפולות של 2.5 ק"ג (רשת הפלטות).</a:t>
+              <a:t>◦  H1 — משקלי הניסיון אינם רציפים אלא נופלים רק על רשת 2.5 ק"ג.</a:t>
             </a:r>
           </a:p>
           <a:p>
             <a:pPr rtl="1" algn="r">
               <a:spcAft>
-                <a:spcPts val="1200"/>
+                <a:spcPts val="1400"/>
               </a:spcAft>
             </a:pPr>
             <a:r>
-              <a:rPr sz="1700" b="0">
+              <a:rPr sz="1800" b="0">
                 <a:solidFill>
                   <a:srgbClr val="222222"/>
                 </a:solidFill>
                 <a:latin typeface="Arial"/>
               </a:rPr>
-              <a:t>◦  H2 - מתחרים "חותכים משקל" כדי לנחות בדיוק מתחת לסף מקטע-המשקל.</a:t>
+              <a:t>◦  H2 — הצטברות משקל-גוף ממש מתחת לסף מקטע-המשקל (עקבי עם חיתוך-משקל).</a:t>
             </a:r>
           </a:p>
           <a:p>
             <a:pPr rtl="1" algn="r">
               <a:spcAft>
-                <a:spcPts val="1200"/>
+                <a:spcPts val="1400"/>
               </a:spcAft>
             </a:pPr>
             <a:r>
-              <a:rPr sz="1700" b="0">
+              <a:rPr sz="1800" b="0">
                 <a:solidFill>
                   <a:srgbClr val="222222"/>
                 </a:solidFill>
                 <a:latin typeface="Arial"/>
               </a:rPr>
-              <a:t>◦  משניות: מבנה התפלגות הכוח, וקנה-המידה האלומטרי.</a:t>
+              <a:t>◦  H3 — קנה-המידה האלומטרי (כוח מול משקל-גוף) שונה בין המינים.</a:t>
+            </a:r>
+          </a:p>
+          <a:p>
+            <a:pPr rtl="1" algn="r">
+              <a:spcAft>
+                <a:spcPts val="1400"/>
+              </a:spcAft>
+            </a:pPr>
+            <a:r>
+              <a:rPr sz="1800" b="0">
+                <a:solidFill>
+                  <a:srgbClr val="222222"/>
+                </a:solidFill>
+                <a:latin typeface="Arial"/>
+              </a:rPr>
+              <a:t>◦  H4 — ניבוי: כמה משתני-השליטה (משקל, ציוד, מין) מנבאים את הכוח הסופי?</a:t>
             </a:r>
           </a:p>
         </p:txBody>
@@ -3904,8 +4109,8 @@
         </p:nvSpPr>
         <p:spPr>
           <a:xfrm>
-            <a:off x="548640" y="1600200"/>
-            <a:ext cx="11091672" cy="4846320"/>
+            <a:off x="548640" y="6473952"/>
+            <a:ext cx="11091672" cy="274320"/>
           </a:xfrm>
           <a:prstGeom prst="rect">
             <a:avLst/>
@@ -3920,65 +4125,120 @@
           <a:p>
             <a:pPr rtl="1" algn="r">
               <a:spcAft>
-                <a:spcPts val="1200"/>
+                <a:spcPts val="0"/>
               </a:spcAft>
             </a:pPr>
             <a:r>
-              <a:rPr sz="1900" b="0">
-                <a:solidFill>
-                  <a:srgbClr val="222222"/>
+              <a:rPr sz="900" b="0">
+                <a:solidFill>
+                  <a:srgbClr val="707070"/>
                 </a:solidFill>
                 <a:latin typeface="Arial"/>
               </a:rPr>
-              <a:t>•  H1 (רשת המשקלים): מודל נראות עם עיגול-רשת (rounded-likelihood MLE) + מבחן יחס-נראות מוכלל (GLRT) למודלים מקוננים.</a:t>
-            </a:r>
-          </a:p>
+              <a:t>תאוריה סטטיסטית · פרויקט סוף · OpenPowerlifting · 5/9</a:t>
+            </a:r>
+          </a:p>
+        </p:txBody>
+      </p:sp>
+      <p:sp>
+        <p:nvSpPr>
+          <p:cNvPr id="5" name="TextBox 4"/>
+          <p:cNvSpPr txBox="1"/>
+          <p:nvPr/>
+        </p:nvSpPr>
+        <p:spPr>
+          <a:xfrm>
+            <a:off x="548640" y="1645920"/>
+            <a:ext cx="11091672" cy="4572000"/>
+          </a:xfrm>
+          <a:prstGeom prst="rect">
+            <a:avLst/>
+          </a:prstGeom>
+          <a:noFill/>
+        </p:spPr>
+        <p:txBody>
+          <a:bodyPr wrap="square" anchor="t">
+            <a:spAutoFit/>
+          </a:bodyPr>
+          <a:lstStyle/>
           <a:p>
             <a:pPr rtl="1" algn="r">
               <a:spcAft>
-                <a:spcPts val="1200"/>
+                <a:spcPts val="1400"/>
               </a:spcAft>
             </a:pPr>
             <a:r>
-              <a:rPr sz="1900" b="0">
+              <a:rPr sz="1950" b="0">
                 <a:solidFill>
                   <a:srgbClr val="222222"/>
                 </a:solidFill>
                 <a:latin typeface="Arial"/>
               </a:rPr>
-              <a:t>•  H2 (חיתוך-משקל): מבחן אי-רציפות-צפיפות (McCrary) סביב הסף + בדיקות הפרכה - פלצבו, de-heaping, ומינון-תגובה.</a:t>
+              <a:t>•  H1: מודל נראות עם עיגול-רשת (rounded-likelihood MLE) + מבחן יחס-נראות מוכלל (GLRT, דחיית H0 לערכים גדולים).</a:t>
             </a:r>
           </a:p>
           <a:p>
             <a:pPr rtl="1" algn="r">
               <a:spcAft>
-                <a:spcPts val="1200"/>
+                <a:spcPts val="1400"/>
               </a:spcAft>
             </a:pPr>
             <a:r>
-              <a:rPr sz="1900" b="0">
+              <a:rPr sz="1950" b="0">
                 <a:solidFill>
                   <a:srgbClr val="222222"/>
                 </a:solidFill>
                 <a:latin typeface="Arial"/>
               </a:rPr>
-              <a:t>•  כלים תומכים: רגרסיה אלומטרית (מבחן Wald), מתאמים, וערכי-קיצון (EVT).</a:t>
+              <a:t>•  H2: מבחן אי-רציפות-צפיפות (McCrary) + מערך-הפרכה — נקודת-בקרה, פלצבו, ו-de-heaping.</a:t>
             </a:r>
           </a:p>
           <a:p>
             <a:pPr rtl="1" algn="r">
               <a:spcAft>
-                <a:spcPts val="1200"/>
+                <a:spcPts val="1400"/>
               </a:spcAft>
             </a:pPr>
             <a:r>
-              <a:rPr sz="1900" b="0">
+              <a:rPr sz="1950" b="0">
                 <a:solidFill>
                   <a:srgbClr val="222222"/>
                 </a:solidFill>
                 <a:latin typeface="Arial"/>
               </a:rPr>
-              <a:t>•  דגש: בגלל n≈3.9M כמעט הכל "מובהק" - לכן מובילים בגודל-אפקט וברווח-סמך, לא ב-p.</a:t>
+              <a:t>•  H3: רגרסיה log-log + מבחן Wald מול 2/3, עם SE חסין ואיבר-אינטראקציה Sex×log(BW).</a:t>
+            </a:r>
+          </a:p>
+          <a:p>
+            <a:pPr rtl="1" algn="r">
+              <a:spcAft>
+                <a:spcPts val="1400"/>
+              </a:spcAft>
+            </a:pPr>
+            <a:r>
+              <a:rPr sz="1950" b="0">
+                <a:solidFill>
+                  <a:srgbClr val="222222"/>
+                </a:solidFill>
+                <a:latin typeface="Arial"/>
+              </a:rPr>
+              <a:t>•  H4: רגרסיה מרובה + Random Forest, הערכה ב-R² / Adjusted-R² / Cross-Validation.</a:t>
+            </a:r>
+          </a:p>
+          <a:p>
+            <a:pPr rtl="1" algn="r">
+              <a:spcAft>
+                <a:spcPts val="1400"/>
+              </a:spcAft>
+            </a:pPr>
+            <a:r>
+              <a:rPr sz="1950" b="0">
+                <a:solidFill>
+                  <a:srgbClr val="222222"/>
+                </a:solidFill>
+                <a:latin typeface="Arial"/>
+              </a:rPr>
+              <a:t>•  תיקון משפחתי לבדיקות מרובות: Bonferroni/Holm/Šidák (FWER) + Benjamini-Hochberg (FDR). בגלל n≈3.9M מובילים בגודל-אפקט+CI, לא ב-p.</a:t>
             </a:r>
           </a:p>
         </p:txBody>
@@ -4092,8 +4352,8 @@
         </p:nvSpPr>
         <p:spPr>
           <a:xfrm>
-            <a:off x="548640" y="1481328"/>
-            <a:ext cx="11091672" cy="1051560"/>
+            <a:off x="548640" y="6473952"/>
+            <a:ext cx="11091672" cy="274320"/>
           </a:xfrm>
           <a:prstGeom prst="rect">
             <a:avLst/>
@@ -4112,20 +4372,59 @@
               </a:spcAft>
             </a:pPr>
             <a:r>
-              <a:rPr sz="1900" b="0">
-                <a:solidFill>
-                  <a:srgbClr val="222222"/>
+              <a:rPr sz="900" b="0">
+                <a:solidFill>
+                  <a:srgbClr val="707070"/>
                 </a:solidFill>
                 <a:latin typeface="Arial"/>
               </a:rPr>
-              <a:t>משקלי הניסיון אינם רציפים: 96.2% מתוך 13.4 מיליון ניסיונות יושבים בדיוק על רשת ה-2.5 ק"ג.</a:t>
+              <a:t>תאוריה סטטיסטית · פרויקט סוף · OpenPowerlifting · 6/9</a:t>
+            </a:r>
+          </a:p>
+        </p:txBody>
+      </p:sp>
+      <p:sp>
+        <p:nvSpPr>
+          <p:cNvPr id="5" name="TextBox 4"/>
+          <p:cNvSpPr txBox="1"/>
+          <p:nvPr/>
+        </p:nvSpPr>
+        <p:spPr>
+          <a:xfrm>
+            <a:off x="548640" y="1463040"/>
+            <a:ext cx="11091672" cy="1051560"/>
+          </a:xfrm>
+          <a:prstGeom prst="rect">
+            <a:avLst/>
+          </a:prstGeom>
+          <a:noFill/>
+        </p:spPr>
+        <p:txBody>
+          <a:bodyPr wrap="square">
+            <a:spAutoFit/>
+          </a:bodyPr>
+          <a:lstStyle/>
+          <a:p>
+            <a:pPr rtl="1" algn="r">
+              <a:spcAft>
+                <a:spcPts val="0"/>
+              </a:spcAft>
+            </a:pPr>
+            <a:r>
+              <a:rPr sz="1800" b="0">
+                <a:solidFill>
+                  <a:srgbClr val="222222"/>
+                </a:solidFill>
+                <a:latin typeface="Arial"/>
+              </a:rPr>
+              <a:t>משקלי הניסיון אינם רציפים: 96.2% מתוך 13.4 מיליון ניסיונות בדיוק על רשת ה-2.5 ק"ג (95% CI [96.19%, 96.21%]).</a:t>
             </a:r>
           </a:p>
         </p:txBody>
       </p:sp>
       <p:pic>
         <p:nvPicPr>
-          <p:cNvPr id="5" name="Picture 4" descr="fig_quantization.png"/>
+          <p:cNvPr id="6" name="Picture 5" descr="fig_quantization.png"/>
           <p:cNvPicPr>
             <a:picLocks noChangeAspect="1"/>
           </p:cNvPicPr>
@@ -4139,8 +4438,8 @@
         </p:blipFill>
         <p:spPr>
           <a:xfrm>
-            <a:off x="2133793" y="2468880"/>
-            <a:ext cx="7924107" cy="4251959"/>
+            <a:off x="2542780" y="2542032"/>
+            <a:ext cx="7106134" cy="3813048"/>
           </a:xfrm>
           <a:prstGeom prst="rect">
             <a:avLst/>
@@ -4256,8 +4555,8 @@
         </p:nvSpPr>
         <p:spPr>
           <a:xfrm>
-            <a:off x="548640" y="1481328"/>
-            <a:ext cx="11091672" cy="1051560"/>
+            <a:off x="548640" y="6473952"/>
+            <a:ext cx="11091672" cy="274320"/>
           </a:xfrm>
           <a:prstGeom prst="rect">
             <a:avLst/>
@@ -4276,20 +4575,59 @@
               </a:spcAft>
             </a:pPr>
             <a:r>
-              <a:rPr sz="1900" b="0">
-                <a:solidFill>
-                  <a:srgbClr val="222222"/>
+              <a:rPr sz="900" b="0">
+                <a:solidFill>
+                  <a:srgbClr val="707070"/>
                 </a:solidFill>
                 <a:latin typeface="Arial"/>
               </a:rPr>
-              <a:t>מתחת לסף 83 ק"ג (מחלקת IPF; גברים, IPF+USAPL) הצטברות בולטת (יחס-לוג +1.92, שורד ניקוי מספרים-עגולים); בנקודת-בקרה שאינה סף (91 ק"ג) אין עודף (≈ -0.21). אינדיקציה ראשונית לחיתוך-משקל; מבחן McCrary פורמלי בהמשך.</a:t>
+              <a:t>תאוריה סטטיסטית · פרויקט סוף · OpenPowerlifting · 7/9</a:t>
+            </a:r>
+          </a:p>
+        </p:txBody>
+      </p:sp>
+      <p:sp>
+        <p:nvSpPr>
+          <p:cNvPr id="5" name="TextBox 4"/>
+          <p:cNvSpPr txBox="1"/>
+          <p:nvPr/>
+        </p:nvSpPr>
+        <p:spPr>
+          <a:xfrm>
+            <a:off x="548640" y="1463040"/>
+            <a:ext cx="11091672" cy="1051560"/>
+          </a:xfrm>
+          <a:prstGeom prst="rect">
+            <a:avLst/>
+          </a:prstGeom>
+          <a:noFill/>
+        </p:spPr>
+        <p:txBody>
+          <a:bodyPr wrap="square">
+            <a:spAutoFit/>
+          </a:bodyPr>
+          <a:lstStyle/>
+          <a:p>
+            <a:pPr rtl="1" algn="r">
+              <a:spcAft>
+                <a:spcPts val="0"/>
+              </a:spcAft>
+            </a:pPr>
+            <a:r>
+              <a:rPr sz="1800" b="0">
+                <a:solidFill>
+                  <a:srgbClr val="222222"/>
+                </a:solidFill>
+                <a:latin typeface="Arial"/>
+              </a:rPr>
+              <a:t>מתחת לסף 83 ק"ג (מחלקת IPF) הצטברות חדה: יחס-לוג מנוקה-עיגול +1.92 ± 0.04 — פי ~6.8 מתחרים ממש-מתחת לעומת ממש-מעל. בבקרה שאינה סף (91 ק"ג): −0.21 ± 0.03. עקבי עם חיתוך-משקל; אישוש פורמלי (McCrary) בהמשך.</a:t>
             </a:r>
           </a:p>
         </p:txBody>
       </p:sp>
       <p:pic>
         <p:nvPicPr>
-          <p:cNvPr id="5" name="Picture 4" descr="fig_bunching.png"/>
+          <p:cNvPr id="6" name="Picture 5" descr="fig_bunching.png"/>
           <p:cNvPicPr>
             <a:picLocks noChangeAspect="1"/>
           </p:cNvPicPr>
@@ -4303,8 +4641,8 @@
         </p:blipFill>
         <p:spPr>
           <a:xfrm>
-            <a:off x="1349473" y="2468880"/>
-            <a:ext cx="9492747" cy="4251959"/>
+            <a:off x="1750746" y="2542032"/>
+            <a:ext cx="8690202" cy="3813048"/>
           </a:xfrm>
           <a:prstGeom prst="rect">
             <a:avLst/>
@@ -4363,7 +4701,7 @@
                 </a:solidFill>
                 <a:latin typeface="Arial"/>
               </a:rPr>
-              <a:t>תוצאות נוספות: קנה-מידה אלומטרי</a:t>
+              <a:t>תוצאות ראשוניות (3): קנה-מידה אלומטרי</a:t>
             </a:r>
           </a:p>
         </p:txBody>
@@ -4420,8 +4758,8 @@
         </p:nvSpPr>
         <p:spPr>
           <a:xfrm>
-            <a:off x="548640" y="1481328"/>
-            <a:ext cx="11091672" cy="1051560"/>
+            <a:off x="548640" y="6473952"/>
+            <a:ext cx="11091672" cy="274320"/>
           </a:xfrm>
           <a:prstGeom prst="rect">
             <a:avLst/>
@@ -4440,20 +4778,59 @@
               </a:spcAft>
             </a:pPr>
             <a:r>
-              <a:rPr sz="1900" b="0">
-                <a:solidFill>
-                  <a:srgbClr val="222222"/>
+              <a:rPr sz="900" b="0">
+                <a:solidFill>
+                  <a:srgbClr val="707070"/>
                 </a:solidFill>
                 <a:latin typeface="Arial"/>
               </a:rPr>
-              <a:t>קנה-המידה שונה בין המינים: b≈0.72 (גברים) / 0.49 (נשים) - הנשים הרבה מתחת ל-2/3 האיזומטרי. אומדן ראשוני (OLS); מבחן פורמלי מול 2/3 בהמשך.</a:t>
+              <a:t>תאוריה סטטיסטית · פרויקט סוף · OpenPowerlifting · 8/9</a:t>
+            </a:r>
+          </a:p>
+        </p:txBody>
+      </p:sp>
+      <p:sp>
+        <p:nvSpPr>
+          <p:cNvPr id="5" name="TextBox 4"/>
+          <p:cNvSpPr txBox="1"/>
+          <p:nvPr/>
+        </p:nvSpPr>
+        <p:spPr>
+          <a:xfrm>
+            <a:off x="548640" y="1463040"/>
+            <a:ext cx="11091672" cy="1051560"/>
+          </a:xfrm>
+          <a:prstGeom prst="rect">
+            <a:avLst/>
+          </a:prstGeom>
+          <a:noFill/>
+        </p:spPr>
+        <p:txBody>
+          <a:bodyPr wrap="square">
+            <a:spAutoFit/>
+          </a:bodyPr>
+          <a:lstStyle/>
+          <a:p>
+            <a:pPr rtl="1" algn="r">
+              <a:spcAft>
+                <a:spcPts val="0"/>
+              </a:spcAft>
+            </a:pPr>
+            <a:r>
+              <a:rPr sz="1800" b="0">
+                <a:solidFill>
+                  <a:srgbClr val="222222"/>
+                </a:solidFill>
+                <a:latin typeface="Arial"/>
+              </a:rPr>
+              <a:t>קנה-המידה שונה בין המינים: b≈0.72 (R²=0.36) גברים / 0.49 (R²=0.19) נשים, מול 2/3 האיזומטרי. ייבדק פורמלית במבחן Wald (SE חסין); b&lt;0.5 לנשים — אומדן ראשוני, ייתכן אפקט טווח-משקל.</a:t>
             </a:r>
           </a:p>
         </p:txBody>
       </p:sp>
       <p:pic>
         <p:nvPicPr>
-          <p:cNvPr id="5" name="Picture 4" descr="fig_allometry.png"/>
+          <p:cNvPr id="6" name="Picture 5" descr="fig_allometry.png"/>
           <p:cNvPicPr>
             <a:picLocks noChangeAspect="1"/>
           </p:cNvPicPr>
@@ -4467,8 +4844,8 @@
         </p:blipFill>
         <p:spPr>
           <a:xfrm>
-            <a:off x="1843887" y="2468880"/>
-            <a:ext cx="8503919" cy="4251959"/>
+            <a:off x="2365691" y="2542032"/>
+            <a:ext cx="7460311" cy="3813048"/>
           </a:xfrm>
           <a:prstGeom prst="rect">
             <a:avLst/>
@@ -4584,8 +4961,8 @@
         </p:nvSpPr>
         <p:spPr>
           <a:xfrm>
-            <a:off x="548640" y="1600200"/>
-            <a:ext cx="11091672" cy="4846320"/>
+            <a:off x="548640" y="6473952"/>
+            <a:ext cx="11091672" cy="274320"/>
           </a:xfrm>
           <a:prstGeom prst="rect">
             <a:avLst/>
@@ -4600,7 +4977,46 @@
           <a:p>
             <a:pPr rtl="1" algn="r">
               <a:spcAft>
-                <a:spcPts val="1200"/>
+                <a:spcPts val="0"/>
+              </a:spcAft>
+            </a:pPr>
+            <a:r>
+              <a:rPr sz="900" b="0">
+                <a:solidFill>
+                  <a:srgbClr val="707070"/>
+                </a:solidFill>
+                <a:latin typeface="Arial"/>
+              </a:rPr>
+              <a:t>תאוריה סטטיסטית · פרויקט סוף · OpenPowerlifting · 9/9</a:t>
+            </a:r>
+          </a:p>
+        </p:txBody>
+      </p:sp>
+      <p:sp>
+        <p:nvSpPr>
+          <p:cNvPr id="5" name="TextBox 4"/>
+          <p:cNvSpPr txBox="1"/>
+          <p:nvPr/>
+        </p:nvSpPr>
+        <p:spPr>
+          <a:xfrm>
+            <a:off x="548640" y="1600200"/>
+            <a:ext cx="11091672" cy="4206240"/>
+          </a:xfrm>
+          <a:prstGeom prst="rect">
+            <a:avLst/>
+          </a:prstGeom>
+          <a:noFill/>
+        </p:spPr>
+        <p:txBody>
+          <a:bodyPr wrap="square">
+            <a:spAutoFit/>
+          </a:bodyPr>
+          <a:lstStyle/>
+          <a:p>
+            <a:pPr rtl="1" algn="r">
+              <a:spcAft>
+                <a:spcPts val="1300"/>
               </a:spcAft>
             </a:pPr>
             <a:r>
@@ -4616,7 +5032,7 @@
           <a:p>
             <a:pPr rtl="1" algn="r">
               <a:spcAft>
-                <a:spcPts val="1200"/>
+                <a:spcPts val="1300"/>
               </a:spcAft>
             </a:pPr>
             <a:r>
@@ -4626,13 +5042,13 @@
                 </a:solidFill>
                 <a:latin typeface="Arial"/>
               </a:rPr>
-              <a:t>•  ההצטברות מתחת לסף שורדת ניקוי-עיגול ונעדרת בנקודת-בקרה - אינדיקציה ראשונית מעודדת (טרם מבוססת).</a:t>
+              <a:t>•  ההצטברות שורדת ניקוי-עיגול ונעדרת בנקודת-בקרה — אינדיקציה ראשונית מעודדת (טרם מבוססת).</a:t>
             </a:r>
           </a:p>
           <a:p>
             <a:pPr rtl="1" algn="r">
               <a:spcAft>
-                <a:spcPts val="1200"/>
+                <a:spcPts val="1300"/>
               </a:spcAft>
             </a:pPr>
             <a:r>
@@ -4642,13 +5058,13 @@
                 </a:solidFill>
                 <a:latin typeface="Arial"/>
               </a:rPr>
-              <a:t>•  הצעדים הבאים: מבחן McCrary פורמלי + בדיקות הפרכה מלאות (פלצבו, מינון-תגובה), מבנה התפלגות הכוח, ואומדן תקרת-כוח (EVT).</a:t>
+              <a:t>•  הצעדים הבאים: McCrary פורמלי + הפרכה, אלומטריה (Wald), ומודל ניבוי-כוח (רגרסיה + Random Forest, R²/CV).</a:t>
             </a:r>
           </a:p>
           <a:p>
             <a:pPr rtl="1" algn="r">
               <a:spcAft>
-                <a:spcPts val="1200"/>
+                <a:spcPts val="1300"/>
               </a:spcAft>
             </a:pPr>
             <a:r>
@@ -4658,7 +5074,23 @@
                 </a:solidFill>
                 <a:latin typeface="Arial"/>
               </a:rPr>
-              <a:t>•  כל התוצאות יוצגו עם גודל-אפקט, רווחי-סמך, ותיקון לבדיקות מרובות.</a:t>
+              <a:t>•  כל התוצאות יוצגו עם גודל-אפקט, רווחי-סמך, ותיקון משפחתי (FWER/FDR).</a:t>
+            </a:r>
+          </a:p>
+          <a:p>
+            <a:pPr rtl="1" algn="r">
+              <a:spcAft>
+                <a:spcPts val="1400"/>
+              </a:spcAft>
+            </a:pPr>
+            <a:r>
+              <a:rPr sz="1900" b="1">
+                <a:solidFill>
+                  <a:srgbClr val="1F3864"/>
+                </a:solidFill>
+                <a:latin typeface="Arial"/>
+              </a:rPr>
+              <a:t>המסקנה: אסטרטגיה משאירה טביעת-אצבע מדידה בנתונים — אנחנו עוברים מתיאור, למבחן, לניבוי.</a:t>
             </a:r>
           </a:p>
           <a:p>

--- a/presentation/mid_presentation_OpenPowerlifting.pptx
+++ b/presentation/mid_presentation_OpenPowerlifting.pptx
@@ -3493,7 +3493,7 @@
                 </a:solidFill>
                 <a:latin typeface="Arial"/>
               </a:rPr>
-              <a:t>•  משתנים: רציפים — משקל-גוף, משקלי-ניסיון, Total, Dots; קטגוריים — מין, ציוד, פדרציה, מקטע-משקל, Tested.</a:t>
+              <a:t>•  משתנים: רציפים — משקל-גוף, משקלי-ניסיון, Total, Dots; קטגוריים — מין, ציוד, פדרציה, קטגוריית-משקל, Tested.</a:t>
             </a:r>
           </a:p>
           <a:p>
@@ -3509,7 +3509,7 @@
                 </a:solidFill>
                 <a:latin typeface="Arial"/>
               </a:rPr>
-              <a:t>•  ניקוי ושחזור: אותו מתחרה מופיע בכמה תחרויות (תלות בין שורות) → dedup לפי-מתחרה; עותק-נתונים נעול לשחזור מלא.</a:t>
+              <a:t>•  אתגרים וטיפול: אותו מתחרה מופיע בכמה תחרויות (תלות בין שורות) → המבחנים הפורמליים ירוצו עם dedup לפי-מתחרה; התוצאות הראשוניות כאן ברמת-ניסיון/שורה. נועלים snapshot של הנתונים לשחזור.</a:t>
             </a:r>
           </a:p>
         </p:txBody>
@@ -3704,7 +3704,7 @@
                 </a:solidFill>
                 <a:latin typeface="Arial"/>
               </a:rPr>
-              <a:t>•  רקע: בהרמת-כוח שלוש הרמות (סקוואט, בנץ', דדליפט), שלושה ניסיונות לכל הרמה, והתחרות בתוך מקטעי משקל-גוף.</a:t>
+              <a:t>•  רקע: בהרמת-כוח שלוש הרמות (סקוואט, בנץ', דדליפט), שלושה ניסיונות לכל הרמה, והתחרות בתוך קטגוריות משקל-גוף.</a:t>
             </a:r>
           </a:p>
           <a:p>
@@ -3915,7 +3915,7 @@
                 </a:solidFill>
                 <a:latin typeface="Arial"/>
               </a:rPr>
-              <a:t>ארבע השערות, סיפור אחד — "שני המספרים" וגבולות הכוח</a:t>
+              <a:t>ארבע השערות, סיפור אחד — H1/H2 "שני המספרים", ו-H3/H4 גבולות-הכוח והניבוי</a:t>
             </a:r>
           </a:p>
           <a:p>
@@ -3963,7 +3963,7 @@
                 </a:solidFill>
                 <a:latin typeface="Arial"/>
               </a:rPr>
-              <a:t>◦  H2 — הצטברות משקל-גוף ממש מתחת לסף מקטע-המשקל (עקבי עם חיתוך-משקל).</a:t>
+              <a:t>◦  H2 — הצטברות משקל-גוף ממש מתחת לסף קטגוריית-המשקל (עקבי עם חיתוך-משקל).</a:t>
             </a:r>
           </a:p>
           <a:p>
@@ -3995,7 +3995,7 @@
                 </a:solidFill>
                 <a:latin typeface="Arial"/>
               </a:rPr>
-              <a:t>◦  H4 — ניבוי: כמה משתני-השליטה (משקל, ציוד, מין) מנבאים את הכוח הסופי?</a:t>
+              <a:t>◦  H4 — ניבוי (לעבודה הסופית): כמה מהכוח ניתן לנבא ממשתני-השליטה (משקל, ציוד, מין, גיל)?</a:t>
             </a:r>
           </a:p>
         </p:txBody>
@@ -4052,7 +4052,7 @@
                 </a:solidFill>
                 <a:latin typeface="Arial"/>
               </a:rPr>
-              <a:t>שיטות המחקר</a:t>
+              <a:t>שיטות החקר</a:t>
             </a:r>
           </a:p>
         </p:txBody>
@@ -4222,7 +4222,7 @@
                 </a:solidFill>
                 <a:latin typeface="Arial"/>
               </a:rPr>
-              <a:t>•  H4: רגרסיה מרובה + Random Forest, הערכה ב-R² / Adjusted-R² / Cross-Validation.</a:t>
+              <a:t>•  H4 (לעבודה הסופית): רגרסיה מרובה + Random Forest (+ סיווג logistic ל-made-weight), הערכה ב-R²/RMSE ו-CV מקובץ לפי-מתחרה.</a:t>
             </a:r>
           </a:p>
           <a:p>
@@ -4238,7 +4238,7 @@
                 </a:solidFill>
                 <a:latin typeface="Arial"/>
               </a:rPr>
-              <a:t>•  תיקון משפחתי לבדיקות מרובות: Bonferroni/Holm/Šidák (FWER) + Benjamini-Hochberg (FDR). בגלל n≈3.9M מובילים בגודל-אפקט+CI, לא ב-p.</a:t>
+              <a:t>•  תיקון להשוואות מרובות: Bonferroni/Holm/Šidák (FWER) + Benjamini-Hochberg (FDR). בגלל n≈3.9M מובילים בגודל-אפקט+CI, לא ב-p.</a:t>
             </a:r>
           </a:p>
         </p:txBody>
@@ -4620,7 +4620,7 @@
                 </a:solidFill>
                 <a:latin typeface="Arial"/>
               </a:rPr>
-              <a:t>מתחת לסף 83 ק"ג (מחלקת IPF) הצטברות חדה: יחס-לוג מנוקה-עיגול +1.92 ± 0.04 — פי ~6.8 מתחרים ממש-מתחת לעומת ממש-מעל. בבקרה שאינה סף (91 ק"ג): −0.21 ± 0.03. עקבי עם חיתוך-משקל; אישוש פורמלי (McCrary) בהמשך.</a:t>
+              <a:t>מתחת לסף 83 ק"ג (מחלקות IPF+USAPL, גברים) הצטברות חדה: יחס-לוג לאחר ניקוי-עיגול (כבר הוחל) +1.92 ± 0.04 — פי ~6.8 ממש-מתחת לעומת ממש-מעל. בבקרה שאינה סף (91 ק"ג): −0.21 ± 0.03. עקבי עם חיתוך-משקל; אישוש פורמלי (McCrary) בהמשך.</a:t>
             </a:r>
           </a:p>
         </p:txBody>
@@ -4823,7 +4823,7 @@
                 </a:solidFill>
                 <a:latin typeface="Arial"/>
               </a:rPr>
-              <a:t>קנה-המידה שונה בין המינים: b≈0.72 (R²=0.36) גברים / 0.49 (R²=0.19) נשים, מול 2/3 האיזומטרי. ייבדק פורמלית במבחן Wald (SE חסין); b&lt;0.5 לנשים — אומדן ראשוני, ייתכן אפקט טווח-משקל.</a:t>
+              <a:t>קנה-המידה שונה בין המינים: b≈0.72 (R²=0.36) גברים / 0.49 (R²=0.19) נשים, מול 2/3 האיזומטרי (רווח-סמך ל-b צר מאוד, ±&lt;0.01 — n עצום). ייבדק פורמלית במבחן Wald (SE חסין); b&lt;0.5 לנשים — אומדן ראשוני, ייתכן אפקט טווח-משקל.</a:t>
             </a:r>
           </a:p>
         </p:txBody>
@@ -5074,7 +5074,7 @@
                 </a:solidFill>
                 <a:latin typeface="Arial"/>
               </a:rPr>
-              <a:t>•  כל התוצאות יוצגו עם גודל-אפקט, רווחי-סמך, ותיקון משפחתי (FWER/FDR).</a:t>
+              <a:t>•  כל התוצאות יוצגו עם גודל-אפקט, רווחי-סמך, ותיקון להשוואות מרובות (FWER/FDR).</a:t>
             </a:r>
           </a:p>
           <a:p>

--- a/presentation/mid_presentation_OpenPowerlifting.pptx
+++ b/presentation/mid_presentation_OpenPowerlifting.pptx
@@ -3190,7 +3190,7 @@
                 </a:solidFill>
                 <a:latin typeface="Arial"/>
               </a:rPr>
-              <a:t>ניתוח סטטיסטי של OpenPowerlifting — מה הנתונים חושפים על גבולות הכוח</a:t>
+              <a:t>ניתוח סטטיסטי של OpenPowerlifting: מה הנתונים חושפים על גבולות הכוח</a:t>
             </a:r>
           </a:p>
           <a:p>
@@ -3238,7 +3238,7 @@
                 </a:solidFill>
                 <a:latin typeface="Arial"/>
               </a:rPr>
-              <a:t>תאוריה סטטיסטית · פרויקט סוף — מצגת אמצע</a:t>
+              <a:t>תאוריה סטטיסטית · פרויקט סוף · מצגת אמצע</a:t>
             </a:r>
           </a:p>
         </p:txBody>
@@ -3461,7 +3461,7 @@
                 </a:solidFill>
                 <a:latin typeface="Arial"/>
               </a:rPr>
-              <a:t>•  מקור: OpenPowerlifting — מאגר פתוח של תוצאות תחרויות הרמת-כוח (רישיון CC0).</a:t>
+              <a:t>•  מקור: OpenPowerlifting, מאגר פתוח של תוצאות תחרויות הרמת-כוח (רישיון CC0).</a:t>
             </a:r>
           </a:p>
           <a:p>
@@ -3493,7 +3493,7 @@
                 </a:solidFill>
                 <a:latin typeface="Arial"/>
               </a:rPr>
-              <a:t>•  משתנים: רציפים — משקל-גוף, משקלי-ניסיון, Total, Dots; קטגוריים — מין, ציוד, פדרציה, קטגוריית-משקל, Tested.</a:t>
+              <a:t>•  משתנים רציפים: משקל-גוף, משקלי-ניסיון, Total, Dots. משתנים קטגוריים: מין, ציוד, פדרציה, קטגוריית-משקל, Tested.</a:t>
             </a:r>
           </a:p>
           <a:p>
@@ -3509,7 +3509,7 @@
                 </a:solidFill>
                 <a:latin typeface="Arial"/>
               </a:rPr>
-              <a:t>•  אתגרים וטיפול: אותו מתחרה מופיע בכמה תחרויות (תלות בין שורות) → המבחנים הפורמליים ירוצו עם dedup לפי-מתחרה; התוצאות הראשוניות כאן ברמת-ניסיון/שורה. נועלים snapshot של הנתונים לשחזור.</a:t>
+              <a:t>•  אתגרים וטיפול: אותו מתחרה מופיע בכמה תחרויות (תלות בין שורות), ולכן המבחנים הפורמליים ירוצו עם שורה אחת לכל מתחרה; התוצאות הראשוניות כאן הן ברמת ניסיון בודד. שומרים גרסת-נתונים קבועה לשחזור.</a:t>
             </a:r>
           </a:p>
         </p:txBody>
@@ -3688,7 +3688,7 @@
                 </a:solidFill>
                 <a:latin typeface="Arial"/>
               </a:rPr>
-              <a:t>הרעיון: שני המספרים שהמתחרה שולט בהם — המוט והמאזניים</a:t>
+              <a:t>הרעיון: שני המספרים שהמתחרה שולט בהם, המוט והמאזניים</a:t>
             </a:r>
           </a:p>
           <a:p>
@@ -3736,7 +3736,7 @@
                 </a:solidFill>
                 <a:latin typeface="Arial"/>
               </a:rPr>
-              <a:t>•  התרומה: לא רק לתאר — אלא מודל-הסתברות מקורי לרשת-המשקלים, ומבחן-מניפולציה עם נקודת-בקרה ו-de-heaping.</a:t>
+              <a:t>•  התרומה: לא רק לתאר, אלא מודל-הסתברות מקורי לרשת-המשקלים, ומבחן-מניפולציה עם נקודת-בקרה ו-de-heaping.</a:t>
             </a:r>
           </a:p>
         </p:txBody>
@@ -3915,7 +3915,7 @@
                 </a:solidFill>
                 <a:latin typeface="Arial"/>
               </a:rPr>
-              <a:t>ארבע השערות, סיפור אחד — H1/H2 "שני המספרים", ו-H3/H4 גבולות-הכוח והניבוי</a:t>
+              <a:t>ארבע השערות, סיפור אחד: H1/H2 הם "שני המספרים", H3/H4 הם גבולות-הכוח והניבוי</a:t>
             </a:r>
           </a:p>
           <a:p>
@@ -3931,7 +3931,7 @@
                 </a:solidFill>
                 <a:latin typeface="Arial"/>
               </a:rPr>
-              <a:t>•  כיצד מתבטאת בנתונים ההתנהגות ה"מחושבת" של מתחרים — בבחירת המשקל על המוט ובמשקל הגוף?</a:t>
+              <a:t>•  כיצד מתבטאת בנתונים ההתנהגות ה"מחושבת" של מתחרים בבחירת המשקל על המוט ובמשקל הגוף?</a:t>
             </a:r>
           </a:p>
           <a:p>
@@ -3947,7 +3947,7 @@
                 </a:solidFill>
                 <a:latin typeface="Arial"/>
               </a:rPr>
-              <a:t>◦  H1 — משקלי הניסיון אינם רציפים אלא נופלים רק על רשת 2.5 ק"ג.</a:t>
+              <a:t>◦  H1: משקלי הניסיון אינם רציפים אלא נופלים רק על רשת 2.5 ק"ג.</a:t>
             </a:r>
           </a:p>
           <a:p>
@@ -3963,7 +3963,7 @@
                 </a:solidFill>
                 <a:latin typeface="Arial"/>
               </a:rPr>
-              <a:t>◦  H2 — הצטברות משקל-גוף ממש מתחת לסף קטגוריית-המשקל (עקבי עם חיתוך-משקל).</a:t>
+              <a:t>◦  H2: הצטברות משקל-גוף ממש מתחת לסף קטגוריית-המשקל (עקבי עם חיתוך-משקל).</a:t>
             </a:r>
           </a:p>
           <a:p>
@@ -3979,7 +3979,7 @@
                 </a:solidFill>
                 <a:latin typeface="Arial"/>
               </a:rPr>
-              <a:t>◦  H3 — קנה-המידה האלומטרי (כוח מול משקל-גוף) שונה בין המינים.</a:t>
+              <a:t>◦  H3: קנה-המידה האלומטרי (כוח מול משקל-גוף) שונה בין המינים.</a:t>
             </a:r>
           </a:p>
           <a:p>
@@ -3995,7 +3995,7 @@
                 </a:solidFill>
                 <a:latin typeface="Arial"/>
               </a:rPr>
-              <a:t>◦  H4 — ניבוי (לעבודה הסופית): כמה מהכוח ניתן לנבא ממשתני-השליטה (משקל, ציוד, מין, גיל)?</a:t>
+              <a:t>◦  H4 (לעבודה הסופית): כמה מהכוח ניתן לנבא ממשתני-השליטה (משקל, ציוד, מין, גיל)?</a:t>
             </a:r>
           </a:p>
         </p:txBody>
@@ -4190,7 +4190,7 @@
                 </a:solidFill>
                 <a:latin typeface="Arial"/>
               </a:rPr>
-              <a:t>•  H2: מבחן אי-רציפות-צפיפות (McCrary) + מערך-הפרכה — נקודת-בקרה, פלצבו, ו-de-heaping.</a:t>
+              <a:t>•  H2: מבחן אי-רציפות-צפיפות (McCrary) + מערך-הפרכה (נקודת-בקרה, פלצבו, de-heaping).</a:t>
             </a:r>
           </a:p>
           <a:p>
@@ -4620,7 +4620,7 @@
                 </a:solidFill>
                 <a:latin typeface="Arial"/>
               </a:rPr>
-              <a:t>מתחת לסף 83 ק"ג (מחלקות IPF+USAPL, גברים) הצטברות חדה: יחס-לוג לאחר ניקוי-עיגול (כבר הוחל) +1.92 ± 0.04 — פי ~6.8 ממש-מתחת לעומת ממש-מעל. בבקרה שאינה סף (91 ק"ג): −0.21 ± 0.03. עקבי עם חיתוך-משקל; אישוש פורמלי (McCrary) בהמשך.</a:t>
+              <a:t>מתחת לסף 83 ק"ג (מחלקות IPF+USAPL, גברים) הצטברות חדה: יחס-לוג לאחר ניקוי-עיגול (כבר הוחל) +1.92 ± 0.04, כלומר פי ~6.8 ממש-מתחת לעומת ממש-מעל. בבקרה שאינה סף (91 ק"ג): −0.21 ± 0.03. עקבי עם חיתוך-משקל; אישוש פורמלי (McCrary) בהמשך.</a:t>
             </a:r>
           </a:p>
         </p:txBody>
@@ -4823,7 +4823,7 @@
                 </a:solidFill>
                 <a:latin typeface="Arial"/>
               </a:rPr>
-              <a:t>קנה-המידה שונה בין המינים: b≈0.72 (R²=0.36) גברים / 0.49 (R²=0.19) נשים, מול 2/3 האיזומטרי (רווח-סמך ל-b צר מאוד, ±&lt;0.01 — n עצום). ייבדק פורמלית במבחן Wald (SE חסין); b&lt;0.5 לנשים — אומדן ראשוני, ייתכן אפקט טווח-משקל.</a:t>
+              <a:t>קנה-המידה שונה בין המינים: b≈0.72 (R²=0.36) גברים / 0.49 (R²=0.19) נשים, מול 2/3 האיזומטרי (רווח-סמך ל-b צר מאוד, ±&lt;0.01, בגלל n עצום). ייבדק פורמלית במבחן Wald (SE חסין); b&lt;0.5 לנשים הוא אומדן ראשוני, ייתכן אפקט טווח-משקל.</a:t>
             </a:r>
           </a:p>
         </p:txBody>
@@ -5042,7 +5042,7 @@
                 </a:solidFill>
                 <a:latin typeface="Arial"/>
               </a:rPr>
-              <a:t>•  ההצטברות שורדת ניקוי-עיגול ונעדרת בנקודת-בקרה — אינדיקציה ראשונית מעודדת (טרם מבוססת).</a:t>
+              <a:t>•  ההצטברות שורדת ניקוי-עיגול ונעדרת בנקודת-בקרה: אינדיקציה ראשונית מעודדת (טרם מבוססת).</a:t>
             </a:r>
           </a:p>
           <a:p>
@@ -5090,7 +5090,7 @@
                 </a:solidFill>
                 <a:latin typeface="Arial"/>
               </a:rPr>
-              <a:t>המסקנה: אסטרטגיה משאירה טביעת-אצבע מדידה בנתונים — אנחנו עוברים מתיאור, למבחן, לניבוי.</a:t>
+              <a:t>המסקנה: אסטרטגיה משאירה טביעת-אצבע מדידה בנתונים, ואנחנו עוברים מתיאור, למבחן, לניבוי.</a:t>
             </a:r>
           </a:p>
           <a:p>

--- a/presentation/mid_presentation_OpenPowerlifting.pptx
+++ b/presentation/mid_presentation_OpenPowerlifting.pptx
@@ -3206,7 +3206,7 @@
                 </a:solidFill>
                 <a:latin typeface="Arial"/>
               </a:rPr>
-              <a:t>96.2% מ-13.4 מיליון ניסיונות נופלים בדיוק על רשת 2.5 ק"ג</a:t>
+              <a:t>פי כ-6.8 יותר מתחרים נשקלים ממש מתחת לסף מחלקת-המשקל מאשר ממש מעליו</a:t>
             </a:r>
           </a:p>
           <a:p>

--- a/presentation/mid_presentation_OpenPowerlifting.pptx
+++ b/presentation/mid_presentation_OpenPowerlifting.pptx
@@ -5090,7 +5090,7 @@
                 </a:solidFill>
                 <a:latin typeface="Arial"/>
               </a:rPr>
-              <a:t>המסקנה: אסטרטגיה משאירה טביעת-אצבע מדידה בנתונים, ואנחנו עוברים מתיאור, למבחן, לניבוי.</a:t>
+              <a:t>המסקנה: האסטרטגיה מותירה עקבות מדידים בנתונים, ואנחנו עוברים מתיאור, למבחן, לניבוי.</a:t>
             </a:r>
           </a:p>
           <a:p>

--- a/presentation/mid_presentation_OpenPowerlifting.pptx
+++ b/presentation/mid_presentation_OpenPowerlifting.pptx
@@ -3736,7 +3736,7 @@
                 </a:solidFill>
                 <a:latin typeface="Arial"/>
               </a:rPr>
-              <a:t>•  התרומה: לא רק לתאר, אלא מודל-הסתברות מקורי לרשת-המשקלים, ומבחן-מניפולציה עם נקודת-בקרה ו-de-heaping.</a:t>
+              <a:t>•  התרומה: לא רק לתאר, אלא מודל-הסתברות מקורי לרשת-המשקלים, ומבחן-מניפולציה עם נקודת-בקרה וניקוי-עיגול.</a:t>
             </a:r>
           </a:p>
         </p:txBody>
@@ -4238,7 +4238,7 @@
                 </a:solidFill>
                 <a:latin typeface="Arial"/>
               </a:rPr>
-              <a:t>•  תיקון להשוואות מרובות: Bonferroni/Holm/Šidák (FWER) + Benjamini-Hochberg (FDR). בגלל n≈3.9M מובילים בגודל-אפקט+CI, לא ב-p.</a:t>
+              <a:t>•  תיקון להשוואות מרובות: Bonferroni/Holm/Šidák (FWER) + Benjamini-Hochberg (FDR). בגלל n≈3.94M (עוצמה גבוהה → כמעט הכל "מובהק") מדגישים גודל-אפקט ו-CI, לא p.</a:t>
             </a:r>
           </a:p>
         </p:txBody>
@@ -4417,7 +4417,7 @@
                 </a:solidFill>
                 <a:latin typeface="Arial"/>
               </a:rPr>
-              <a:t>משקלי הניסיון אינם רציפים: 96.2% מתוך 13.4 מיליון ניסיונות בדיוק על רשת ה-2.5 ק"ג (95% CI [96.19%, 96.21%]).</a:t>
+              <a:t>משקלי הניסיון אינם רציפים: 96.2% מתוך 13.4 מיליון ניסיונות בדיוק על רשת ה-2.5 ק"ג ‎(95% CI [96.19%, 96.21%])‎.</a:t>
             </a:r>
           </a:p>
         </p:txBody>
@@ -4620,7 +4620,7 @@
                 </a:solidFill>
                 <a:latin typeface="Arial"/>
               </a:rPr>
-              <a:t>מתחת לסף 83 ק"ג (מחלקות IPF+USAPL, גברים) הצטברות חדה: יחס-לוג לאחר ניקוי-עיגול (כבר הוחל) +1.92 ± 0.04, כלומר פי ~6.8 ממש-מתחת לעומת ממש-מעל. בבקרה שאינה סף (91 ק"ג): −0.21 ± 0.03. עקבי עם חיתוך-משקל; אישוש פורמלי (McCrary) בהמשך.</a:t>
+              <a:t>מתחת לסף 83 ק"ג (IPF+USAPL, גברים; סכמת-מחלקות אחידה) הצטברות חדה: יחס-לוג לאחר ניקוי-עיגול (כבר הוחל) ‎+1.92 ± 0.04‎, כלומר פי כ-6.8 ממש-מתחת לעומת ממש-מעל. בבקרה שאינה סף (91 ק"ג): ‎−0.21 ± 0.03‎. עקבי עם חיתוך-משקל; אישוש פורמלי (McCrary) בהמשך.</a:t>
             </a:r>
           </a:p>
         </p:txBody>
@@ -4823,7 +4823,7 @@
                 </a:solidFill>
                 <a:latin typeface="Arial"/>
               </a:rPr>
-              <a:t>קנה-המידה שונה בין המינים: b≈0.72 (R²=0.36) גברים / 0.49 (R²=0.19) נשים, מול 2/3 האיזומטרי (רווח-סמך ל-b צר מאוד, ±&lt;0.01, בגלל n עצום). ייבדק פורמלית במבחן Wald (SE חסין); b&lt;0.5 לנשים הוא אומדן ראשוני, ייתכן אפקט טווח-משקל.</a:t>
+              <a:t>קנה-המידה שונה בין המינים: ‎b≈0.72 (R²=0.36)‎ גברים / ‎0.49 (R²=0.19)‎ נשים, מול 2/3 האיזומטרי (רווח-הסמך ל-b צר מאוד, ‎±&lt;0.01‎, בגלל n עצום). ייבדק פורמלית במבחן Wald (SE חסין); ‎b&lt;0.5‎ לנשים הוא אומדן ראשוני, ייתכן אפקט טווח-משקל.</a:t>
             </a:r>
           </a:p>
         </p:txBody>

--- a/presentation/mid_presentation_OpenPowerlifting.pptx
+++ b/presentation/mid_presentation_OpenPowerlifting.pptx
@@ -3509,7 +3509,7 @@
                 </a:solidFill>
                 <a:latin typeface="Arial"/>
               </a:rPr>
-              <a:t>•  אתגרים וטיפול: אותו מתחרה מופיע בכמה תחרויות (תלות בין שורות), ולכן המבחנים הפורמליים ירוצו עם שורה אחת לכל מתחרה; התוצאות הראשוניות כאן הן ברמת ניסיון בודד. שומרים גרסת-נתונים קבועה לשחזור.</a:t>
+              <a:t>•  אתגר עיקרי: אותו מתחרה מופיע בכמה תחרויות, אז במבחנים הפורמליים ניקח שורה אחת לכל מתחרה. שומרים גרסת-נתונים קבועה לשחזור.</a:t>
             </a:r>
           </a:p>
         </p:txBody>
@@ -3736,7 +3736,7 @@
                 </a:solidFill>
                 <a:latin typeface="Arial"/>
               </a:rPr>
-              <a:t>•  התרומה: לא רק לתאר, אלא מודל-הסתברות מקורי לרשת-המשקלים, ומבחן-מניפולציה עם נקודת-בקרה וניקוי-עיגול.</a:t>
+              <a:t>•  התרומה שלנו: לא רק להראות את התופעה, אלא לבדוק אותה בצורה מסודרת, עם מודל ועם נקודת-בקרה.</a:t>
             </a:r>
           </a:p>
         </p:txBody>
@@ -4174,7 +4174,7 @@
                 </a:solidFill>
                 <a:latin typeface="Arial"/>
               </a:rPr>
-              <a:t>•  H1: מודל נראות עם עיגול-רשת (rounded-likelihood MLE) + מבחן יחס-נראות מוכלל (GLRT, דחיית H0 לערכים גדולים).</a:t>
+              <a:t>•  H1 (רשת המוט): מודל שבודק אם המשקלים יושבים על רשת 2.5 ק"ג, עם מבחן GLRT (השוואת שני מודלים).</a:t>
             </a:r>
           </a:p>
           <a:p>
@@ -4190,7 +4190,7 @@
                 </a:solidFill>
                 <a:latin typeface="Arial"/>
               </a:rPr>
-              <a:t>•  H2: מבחן אי-רציפות-צפיפות (McCrary) + מערך-הפרכה (נקודת-בקרה, פלצבו, de-heaping).</a:t>
+              <a:t>•  H2 (חיתוך-משקל): מבחן McCrary לקפיצה בצפיפות סביב הסף, עם נקודת-בקרה וניקוי מספרים-עגולים.</a:t>
             </a:r>
           </a:p>
           <a:p>
@@ -4206,7 +4206,7 @@
                 </a:solidFill>
                 <a:latin typeface="Arial"/>
               </a:rPr>
-              <a:t>•  H3: רגרסיה log-log + מבחן Wald מול 2/3, עם SE חסין ואיבר-אינטראקציה Sex×log(BW).</a:t>
+              <a:t>•  H3 (כוח מול משקל): רגרסיה שבודקת אם קנה-המידה שונה מ-2/3 ובין המינים (מבחן Wald).</a:t>
             </a:r>
           </a:p>
           <a:p>
@@ -4222,7 +4222,7 @@
                 </a:solidFill>
                 <a:latin typeface="Arial"/>
               </a:rPr>
-              <a:t>•  H4 (לעבודה הסופית): רגרסיה מרובה + Random Forest (+ סיווג logistic ל-made-weight), הערכה ב-R²/RMSE ו-CV מקובץ לפי-מתחרה.</a:t>
+              <a:t>•  H4 (לעבודה הסופית): מודל ניבוי-כוח, רגרסיה + Random Forest + סיווג, שנבדק על נתונים חדשים.</a:t>
             </a:r>
           </a:p>
           <a:p>
@@ -4238,7 +4238,7 @@
                 </a:solidFill>
                 <a:latin typeface="Arial"/>
               </a:rPr>
-              <a:t>•  תיקון להשוואות מרובות: Bonferroni/Holm/Šidák (FWER) + Benjamini-Hochberg (FDR). בגלל n≈3.94M (עוצמה גבוהה → כמעט הכל "מובהק") מדגישים גודל-אפקט ו-CI, לא p.</a:t>
+              <a:t>•  כי המדגם ענק (כמעט 4 מיליון, עוצמה גבוהה), כמעט הכל יוצא "מובהק", אז מדגישים גודל-אפקט ורווח-סמך, לא p. תיקונים לבדיקות-מרובות: Bonferroni/Holm/Šidák (FWER) + BH (FDR).</a:t>
             </a:r>
           </a:p>
         </p:txBody>
@@ -4620,7 +4620,7 @@
                 </a:solidFill>
                 <a:latin typeface="Arial"/>
               </a:rPr>
-              <a:t>מתחת לסף 83 ק"ג (IPF+USAPL, גברים; סכמת-מחלקות אחידה) הצטברות חדה: יחס-לוג לאחר ניקוי-עיגול (כבר הוחל) ‎+1.92 ± 0.04‎, כלומר פי כ-6.8 ממש-מתחת לעומת ממש-מעל. בבקרה שאינה סף (91 ק"ג): ‎−0.21 ± 0.03‎. עקבי עם חיתוך-משקל; אישוש פורמלי (McCrary) בהמשך.</a:t>
+              <a:t>פי כ-6.8 יותר מתחרים נשקלים בדיוק מתחת לסף 83 ק"ג מאשר מעליו (גברים, IPF+USAPL). במספרים: יחס-לוג ‎+1.92 ± 0.04‎, גם אחרי ניקוי מספרים-עגולים. בבקרה שאינה סף (91 ק"ג) אין הצטברות כזו: ‎−0.21 ± 0.03‎. עקבי עם חיתוך-משקל; אישוש פורמלי (McCrary) בהמשך.</a:t>
             </a:r>
           </a:p>
         </p:txBody>
@@ -4823,7 +4823,7 @@
                 </a:solidFill>
                 <a:latin typeface="Arial"/>
               </a:rPr>
-              <a:t>קנה-המידה שונה בין המינים: ‎b≈0.72 (R²=0.36)‎ גברים / ‎0.49 (R²=0.19)‎ נשים, מול 2/3 האיזומטרי (רווח-הסמך ל-b צר מאוד, ‎±&lt;0.01‎, בגלל n עצום). ייבדק פורמלית במבחן Wald (SE חסין); ‎b&lt;0.5‎ לנשים הוא אומדן ראשוני, ייתכן אפקט טווח-משקל.</a:t>
+              <a:t>הכוח גדל עם משקל-הגוף, אבל אחרת אצל גברים ונשים: ‎b≈0.72 (R²=0.36)‎ גברים / ‎0.49 (R²=0.19)‎ נשים, מול 2/3 בתאוריה. זה אומדן ראשוני; נבדוק פורמלית במבחן Wald.</a:t>
             </a:r>
           </a:p>
         </p:txBody>

--- a/presentation/mid_presentation_OpenPowerlifting.pptx
+++ b/presentation/mid_presentation_OpenPowerlifting.pptx
@@ -3947,7 +3947,7 @@
                 </a:solidFill>
                 <a:latin typeface="Arial"/>
               </a:rPr>
-              <a:t>◦  H1: משקלי הניסיון אינם רציפים אלא נופלים רק על רשת 2.5 ק"ג.</a:t>
+              <a:t>◦  H1: משקלי הניסיון אינם רציפים אלא נופלים כמעט תמיד על רשת 2.5 ק"ג.</a:t>
             </a:r>
           </a:p>
           <a:p>
@@ -3995,7 +3995,7 @@
                 </a:solidFill>
                 <a:latin typeface="Arial"/>
               </a:rPr>
-              <a:t>◦  H4 (לעבודה הסופית): כמה מהכוח ניתן לנבא ממשתני-השליטה (משקל, ציוד, מין, גיל)?</a:t>
+              <a:t>◦  H4 (לעבודה הסופית): כמה מהכוח ניתן לנבא ממשתנים בסיסיים (משקל-גוף, ציוד, מין, גיל)?</a:t>
             </a:r>
           </a:p>
         </p:txBody>
@@ -4206,7 +4206,7 @@
                 </a:solidFill>
                 <a:latin typeface="Arial"/>
               </a:rPr>
-              <a:t>•  H3 (כוח מול משקל): רגרסיה שבודקת אם קנה-המידה שונה מ-2/3 ובין המינים (מבחן Wald).</a:t>
+              <a:t>•  H3 (כוח מול משקל): רגרסיה שבודקת אם קנה-המידה שונה מ-2/3, ואם הוא שונה בין המינים (מבחן Wald).</a:t>
             </a:r>
           </a:p>
           <a:p>
@@ -4844,8 +4844,8 @@
         </p:blipFill>
         <p:spPr>
           <a:xfrm>
-            <a:off x="2365691" y="2542032"/>
-            <a:ext cx="7460311" cy="3813048"/>
+            <a:off x="1750746" y="2542032"/>
+            <a:ext cx="8690202" cy="3813048"/>
           </a:xfrm>
           <a:prstGeom prst="rect">
             <a:avLst/>
@@ -5058,7 +5058,7 @@
                 </a:solidFill>
                 <a:latin typeface="Arial"/>
               </a:rPr>
-              <a:t>•  הצעדים הבאים: McCrary פורמלי + הפרכה, אלומטריה (Wald), ומודל ניבוי-כוח (רגרסיה + Random Forest, R²/CV).</a:t>
+              <a:t>•  הצעדים הבאים: McCrary פורמלי + בדיקות-עמידות (פלצבו), אלומטריה (Wald), ומודל ניבוי-כוח (רגרסיה + Random Forest, R²/CV).</a:t>
             </a:r>
           </a:p>
           <a:p>
@@ -5090,7 +5090,7 @@
                 </a:solidFill>
                 <a:latin typeface="Arial"/>
               </a:rPr>
-              <a:t>המסקנה: האסטרטגיה מותירה עקבות מדידים בנתונים, ואנחנו עוברים מתיאור, למבחן, לניבוי.</a:t>
+              <a:t>המסקנה: האסטרטגיה מותירה עקבות מדידות בנתונים, ואנחנו עוברים מתיאור, למבחן, לניבוי.</a:t>
             </a:r>
           </a:p>
           <a:p>

--- a/presentation/mid_presentation_OpenPowerlifting.pptx
+++ b/presentation/mid_presentation_OpenPowerlifting.pptx
@@ -3477,7 +3477,7 @@
                 </a:solidFill>
                 <a:latin typeface="Arial"/>
               </a:rPr>
-              <a:t>•  היקף: כ-3.94 מיליון תוצאות (שורה לכל מתחרה בכל תחרות), 42 משתנים.</a:t>
+              <a:t>•  היקף: כ-3.94 מיליון תוצאות, 42 משתנים. יחידת-התצפית: שורה לכל מתחרה בכל תחרות.</a:t>
             </a:r>
           </a:p>
           <a:p>
@@ -3493,7 +3493,7 @@
                 </a:solidFill>
                 <a:latin typeface="Arial"/>
               </a:rPr>
-              <a:t>•  משתנים רציפים: משקל-גוף, משקלי-ניסיון, Total, Dots. משתנים קטגוריים: מין, ציוד, פדרציה, קטגוריית-משקל, Tested.</a:t>
+              <a:t>•  אתגר עיקרי (אי-תלות): אותו מתחרה מופיע בכמה תחרויות, אז במבחנים הפורמליים ניקח שורה אחת לכל מתחרה.</a:t>
             </a:r>
           </a:p>
           <a:p>
@@ -3509,7 +3509,7 @@
                 </a:solidFill>
                 <a:latin typeface="Arial"/>
               </a:rPr>
-              <a:t>•  אתגר עיקרי: אותו מתחרה מופיע בכמה תחרויות, אז במבחנים הפורמליים ניקח שורה אחת לכל מתחרה. שומרים גרסת-נתונים קבועה לשחזור.</a:t>
+              <a:t>•  שומרים גרסת-נתונים קבועה לשחזור.</a:t>
             </a:r>
           </a:p>
         </p:txBody>
@@ -3915,7 +3915,7 @@
                 </a:solidFill>
                 <a:latin typeface="Arial"/>
               </a:rPr>
-              <a:t>ארבע השערות, סיפור אחד: H1/H2 הם "שני המספרים", H3/H4 הם גבולות-הכוח והניבוי</a:t>
+              <a:t>שאלת המחקר: כיצד מתחרי הרמת-כוח "משחקים" עם שני המספרים שבשליטתם (המוט והמאזניים), ומה הדפוסים מגלים על גבולות הכוח?</a:t>
             </a:r>
           </a:p>
           <a:p>
@@ -3931,7 +3931,7 @@
                 </a:solidFill>
                 <a:latin typeface="Arial"/>
               </a:rPr>
-              <a:t>•  כיצד מתבטאת בנתונים ההתנהגות ה"מחושבת" של מתחרים בבחירת המשקל על המוט ובמשקל הגוף?</a:t>
+              <a:t>•  ארבע ההשערות מפרקות את השאלה: H1/H2 הם "שני המספרים", H3/H4 הם גבולות-הכוח והניבוי.</a:t>
             </a:r>
           </a:p>
           <a:p>
@@ -4238,7 +4238,7 @@
                 </a:solidFill>
                 <a:latin typeface="Arial"/>
               </a:rPr>
-              <a:t>•  כי המדגם ענק (כמעט 4 מיליון, עוצמה גבוהה), כמעט הכל יוצא "מובהק", אז מדגישים גודל-אפקט ורווח-סמך, לא p. תיקונים לבדיקות-מרובות: Bonferroni/Holm/Šidák (FWER) + BH (FDR).</a:t>
+              <a:t>•  כי המדגם ענק (כמעט 4 מיליון, עוצמה גבוהה), כמעט הכל יוצא "מובהק", אז מדגישים גודל-אפקט ורווח-סמך, לא p. מיישמים גם תיקון להשוואות מרובות.</a:t>
             </a:r>
           </a:p>
         </p:txBody>
@@ -4595,6 +4595,45 @@
         <p:spPr>
           <a:xfrm>
             <a:off x="548640" y="1463040"/>
+            <a:ext cx="11091672" cy="502920"/>
+          </a:xfrm>
+          <a:prstGeom prst="rect">
+            <a:avLst/>
+          </a:prstGeom>
+          <a:noFill/>
+        </p:spPr>
+        <p:txBody>
+          <a:bodyPr wrap="square">
+            <a:spAutoFit/>
+          </a:bodyPr>
+          <a:lstStyle/>
+          <a:p>
+            <a:pPr rtl="1" algn="ctr">
+              <a:spcAft>
+                <a:spcPts val="0"/>
+              </a:spcAft>
+            </a:pPr>
+            <a:r>
+              <a:rPr sz="2100" b="1">
+                <a:solidFill>
+                  <a:srgbClr val="C0531B"/>
+                </a:solidFill>
+                <a:latin typeface="Arial"/>
+              </a:rPr>
+              <a:t>סף אמיתי 83 ק"ג → הצטברות · בקרה 91 ק"ג → אין</a:t>
+            </a:r>
+          </a:p>
+        </p:txBody>
+      </p:sp>
+      <p:sp>
+        <p:nvSpPr>
+          <p:cNvPr id="6" name="TextBox 5"/>
+          <p:cNvSpPr txBox="1"/>
+          <p:nvPr/>
+        </p:nvSpPr>
+        <p:spPr>
+          <a:xfrm>
+            <a:off x="548640" y="1993392"/>
             <a:ext cx="11091672" cy="1051560"/>
           </a:xfrm>
           <a:prstGeom prst="rect">
@@ -4620,14 +4659,14 @@
                 </a:solidFill>
                 <a:latin typeface="Arial"/>
               </a:rPr>
-              <a:t>פי כ-6.8 יותר מתחרים נשקלים בדיוק מתחת לסף 83 ק"ג מאשר מעליו (גברים, IPF+USAPL). במספרים: יחס-לוג ‎+1.92 ± 0.04‎, גם אחרי ניקוי מספרים-עגולים. בבקרה שאינה סף (91 ק"ג) אין הצטברות כזו: ‎−0.21 ± 0.03‎. עקבי עם חיתוך-משקל; אישוש פורמלי (McCrary) בהמשך.</a:t>
+              <a:t>פי כ-6.8 יותר מתחת לסף 83 ק"ג מאשר מעליו (גברים, IPF+USAPL): יחס-לוג ‎+1.92 ± 0.04‎, גם אחרי ניקוי מספרים-עגולים. בבקרה 91 ק"ג: ‎−0.21 ± 0.03‎. עקבי עם חיתוך-משקל; אישוש פורמלי (McCrary) בהמשך.</a:t>
             </a:r>
           </a:p>
         </p:txBody>
       </p:sp>
       <p:pic>
         <p:nvPicPr>
-          <p:cNvPr id="6" name="Picture 5" descr="fig_bunching.png"/>
+          <p:cNvPr id="7" name="Picture 6" descr="fig_bunching.png"/>
           <p:cNvPicPr>
             <a:picLocks noChangeAspect="1"/>
           </p:cNvPicPr>
@@ -4641,8 +4680,8 @@
         </p:blipFill>
         <p:spPr>
           <a:xfrm>
-            <a:off x="1750746" y="2542032"/>
-            <a:ext cx="8690202" cy="3813048"/>
+            <a:off x="2292581" y="3017520"/>
+            <a:ext cx="7606532" cy="3337560"/>
           </a:xfrm>
           <a:prstGeom prst="rect">
             <a:avLst/>
@@ -5059,22 +5098,6 @@
                 <a:latin typeface="Arial"/>
               </a:rPr>
               <a:t>•  הצעדים הבאים: McCrary פורמלי + בדיקות-עמידות (פלצבו), אלומטריה (Wald), ומודל ניבוי-כוח (רגרסיה + Random Forest, R²/CV).</a:t>
-            </a:r>
-          </a:p>
-          <a:p>
-            <a:pPr rtl="1" algn="r">
-              <a:spcAft>
-                <a:spcPts val="1300"/>
-              </a:spcAft>
-            </a:pPr>
-            <a:r>
-              <a:rPr sz="1900" b="0">
-                <a:solidFill>
-                  <a:srgbClr val="222222"/>
-                </a:solidFill>
-                <a:latin typeface="Arial"/>
-              </a:rPr>
-              <a:t>•  כל התוצאות יוצגו עם גודל-אפקט, רווחי-סמך, ותיקון להשוואות מרובות (FWER/FDR).</a:t>
             </a:r>
           </a:p>
           <a:p>

--- a/presentation/mid_presentation_OpenPowerlifting.pptx
+++ b/presentation/mid_presentation_OpenPowerlifting.pptx
@@ -14,6 +14,7 @@
     <p:sldId id="262" r:id="rId13"/>
     <p:sldId id="263" r:id="rId14"/>
     <p:sldId id="264" r:id="rId15"/>
+    <p:sldId id="265" r:id="rId16"/>
   </p:sldIdLst>
   <p:sldSz cx="12191695" cy="6858000" type="screen4x3"/>
   <p:notesSz cx="6858000" cy="9144000"/>
@@ -3287,6 +3288,209 @@
           </a:p>
         </p:txBody>
       </p:sp>
+    </p:spTree>
+  </p:cSld>
+  <p:clrMapOvr>
+    <a:masterClrMapping/>
+  </p:clrMapOvr>
+</p:sld>
+</file>
+
+<file path=ppt/slides/slide10.xml><?xml version="1.0" encoding="utf-8"?>
+<p:sld xmlns:a="http://schemas.openxmlformats.org/drawingml/2006/main" xmlns:p="http://schemas.openxmlformats.org/presentationml/2006/main" xmlns:r="http://schemas.openxmlformats.org/officeDocument/2006/relationships">
+  <p:cSld>
+    <p:spTree>
+      <p:nvGrpSpPr>
+        <p:cNvPr id="1" name=""/>
+        <p:cNvGrpSpPr/>
+        <p:nvPr/>
+      </p:nvGrpSpPr>
+      <p:grpSpPr/>
+      <p:sp>
+        <p:nvSpPr>
+          <p:cNvPr id="2" name="TextBox 1"/>
+          <p:cNvSpPr txBox="1"/>
+          <p:nvPr/>
+        </p:nvSpPr>
+        <p:spPr>
+          <a:xfrm>
+            <a:off x="548640" y="411480"/>
+            <a:ext cx="11091672" cy="868680"/>
+          </a:xfrm>
+          <a:prstGeom prst="rect">
+            <a:avLst/>
+          </a:prstGeom>
+          <a:noFill/>
+        </p:spPr>
+        <p:txBody>
+          <a:bodyPr wrap="square">
+            <a:spAutoFit/>
+          </a:bodyPr>
+          <a:lstStyle/>
+          <a:p>
+            <a:pPr rtl="1" algn="r">
+              <a:spcAft>
+                <a:spcPts val="800"/>
+              </a:spcAft>
+            </a:pPr>
+            <a:r>
+              <a:rPr sz="2800" b="1">
+                <a:solidFill>
+                  <a:srgbClr val="1F3864"/>
+                </a:solidFill>
+                <a:latin typeface="Arial"/>
+              </a:rPr>
+              <a:t>גיבוי · למה לא מבחני-נורמליות פורמליים</a:t>
+            </a:r>
+          </a:p>
+        </p:txBody>
+      </p:sp>
+      <p:sp>
+        <p:nvSpPr>
+          <p:cNvPr id="3" name="Rectangle 2"/>
+          <p:cNvSpPr/>
+          <p:nvPr/>
+        </p:nvSpPr>
+        <p:spPr>
+          <a:xfrm>
+            <a:off x="548640" y="1325880"/>
+            <a:ext cx="11091672" cy="41148"/>
+          </a:xfrm>
+          <a:prstGeom prst="rect">
+            <a:avLst/>
+          </a:prstGeom>
+          <a:solidFill>
+            <a:srgbClr val="2E86C1"/>
+          </a:solidFill>
+          <a:ln>
+            <a:noFill/>
+          </a:ln>
+          <a:effectLst/>
+        </p:spPr>
+        <p:style>
+          <a:lnRef idx="1">
+            <a:schemeClr val="accent1"/>
+          </a:lnRef>
+          <a:fillRef idx="3">
+            <a:schemeClr val="accent1"/>
+          </a:fillRef>
+          <a:effectRef idx="2">
+            <a:schemeClr val="accent1"/>
+          </a:effectRef>
+          <a:fontRef idx="minor">
+            <a:schemeClr val="lt1"/>
+          </a:fontRef>
+        </p:style>
+        <p:txBody>
+          <a:bodyPr rtlCol="0" anchor="ctr"/>
+          <a:lstStyle/>
+          <a:p>
+            <a:pPr algn="ctr"/>
+          </a:p>
+        </p:txBody>
+      </p:sp>
+      <p:sp>
+        <p:nvSpPr>
+          <p:cNvPr id="4" name="TextBox 3"/>
+          <p:cNvSpPr txBox="1"/>
+          <p:nvPr/>
+        </p:nvSpPr>
+        <p:spPr>
+          <a:xfrm>
+            <a:off x="548640" y="6473952"/>
+            <a:ext cx="11091672" cy="274320"/>
+          </a:xfrm>
+          <a:prstGeom prst="rect">
+            <a:avLst/>
+          </a:prstGeom>
+          <a:noFill/>
+        </p:spPr>
+        <p:txBody>
+          <a:bodyPr wrap="square">
+            <a:spAutoFit/>
+          </a:bodyPr>
+          <a:lstStyle/>
+          <a:p>
+            <a:pPr rtl="1" algn="r">
+              <a:spcAft>
+                <a:spcPts val="0"/>
+              </a:spcAft>
+            </a:pPr>
+            <a:r>
+              <a:rPr sz="900" b="0">
+                <a:solidFill>
+                  <a:srgbClr val="707070"/>
+                </a:solidFill>
+                <a:latin typeface="Arial"/>
+              </a:rPr>
+              <a:t>שקף גיבוי · לא מוצג במצגת הראשית · נשלף רק לשאלה על הנחות-המודל</a:t>
+            </a:r>
+          </a:p>
+        </p:txBody>
+      </p:sp>
+      <p:sp>
+        <p:nvSpPr>
+          <p:cNvPr id="5" name="TextBox 4"/>
+          <p:cNvSpPr txBox="1"/>
+          <p:nvPr/>
+        </p:nvSpPr>
+        <p:spPr>
+          <a:xfrm>
+            <a:off x="548640" y="1463040"/>
+            <a:ext cx="11091672" cy="1234440"/>
+          </a:xfrm>
+          <a:prstGeom prst="rect">
+            <a:avLst/>
+          </a:prstGeom>
+          <a:noFill/>
+        </p:spPr>
+        <p:txBody>
+          <a:bodyPr wrap="square">
+            <a:spAutoFit/>
+          </a:bodyPr>
+          <a:lstStyle/>
+          <a:p>
+            <a:pPr rtl="1" algn="r">
+              <a:spcAft>
+                <a:spcPts val="0"/>
+              </a:spcAft>
+            </a:pPr>
+            <a:r>
+              <a:rPr sz="1600" b="0">
+                <a:solidFill>
+                  <a:srgbClr val="222222"/>
+                </a:solidFill>
+                <a:latin typeface="Arial"/>
+              </a:rPr>
+              <a:t>המבחנים המרכזיים שלנו לא נשענים על נורמליות: GLRT על מודל בדיד (H1), McCrary על צפיפות (H2), ולמידת-מכונה (H4). ברגרסיית האלומטריה (H3) השאריות אינן נורמליות לחלוטין (זנב-תחתון כבד), אבל אמידת-השיפוע תקפה בזכות משפט-הגבול-המרכזי, ומבחן-נורמליות פורמלי דוחה ב-n ענק כל סטייה זעירה (בדיוק כמו p): לכן מובילים בגודל-אפקט וברווח-סמך.</a:t>
+            </a:r>
+          </a:p>
+        </p:txBody>
+      </p:sp>
+      <p:pic>
+        <p:nvPicPr>
+          <p:cNvPr id="6" name="Picture 5" descr="fig_normality_backup.png"/>
+          <p:cNvPicPr>
+            <a:picLocks noChangeAspect="1"/>
+          </p:cNvPicPr>
+          <p:nvPr/>
+        </p:nvPicPr>
+        <p:blipFill>
+          <a:blip r:embed="rId2"/>
+          <a:stretch>
+            <a:fillRect/>
+          </a:stretch>
+        </p:blipFill>
+        <p:spPr>
+          <a:xfrm>
+            <a:off x="2268126" y="2971800"/>
+            <a:ext cx="7655441" cy="3291839"/>
+          </a:xfrm>
+          <a:prstGeom prst="rect">
+            <a:avLst/>
+          </a:prstGeom>
+        </p:spPr>
+      </p:pic>
     </p:spTree>
   </p:cSld>
   <p:clrMapOvr>

--- a/presentation/mid_presentation_OpenPowerlifting.pptx
+++ b/presentation/mid_presentation_OpenPowerlifting.pptx
@@ -3462,7 +3462,7 @@
                 </a:solidFill>
                 <a:latin typeface="Arial"/>
               </a:rPr>
-              <a:t>המבחנים המרכזיים שלנו לא נשענים על נורמליות: GLRT על מודל בדיד (H1), McCrary על צפיפות (H2), ולמידת-מכונה (H4). ברגרסיית האלומטריה (H3) השאריות אינן נורמליות לחלוטין (זנב-תחתון כבד), אבל אמידת-השיפוע תקפה בזכות משפט-הגבול-המרכזי, ומבחן-נורמליות פורמלי דוחה ב-n ענק כל סטייה זעירה (בדיוק כמו p): לכן מובילים בגודל-אפקט וברווח-סמך.</a:t>
+              <a:t>המבחנים המרכזיים שלנו לא נשענים על נורמליות: GLRT על מודל בדיד (H1), McCrary על צפיפות (H2), ולמידת-מכונה (H4). ברגרסיית האלומטריה (H3) השאריות אינן נורמליות לחלוטין (זנב-תחתון כבד), אבל אמידת-השיפוע תקפה אסימפטוטית במדגם ענק (במיוחד עם SE חסין/מקובץ לפי מתחרה), ומבחן-נורמליות פורמלי דוחה ב-n ענק כל סטייה זעירה (בדיוק כמו p): לכן מובילים בגודל-אפקט וברווח-סמך.</a:t>
             </a:r>
           </a:p>
         </p:txBody>

--- a/presentation/mid_presentation_OpenPowerlifting.pptx
+++ b/presentation/mid_presentation_OpenPowerlifting.pptx
@@ -4824,7 +4824,7 @@
                 </a:solidFill>
                 <a:latin typeface="Arial"/>
               </a:rPr>
-              <a:t>סף אמיתי 83 ק"ג → הצטברות · בקרה 91 ק"ג → אין</a:t>
+              <a:t>סף אמיתי 83 ק"ג: הצטברות · בקרה 91 ק"ג: אין הצטברות</a:t>
             </a:r>
           </a:p>
         </p:txBody>

--- a/presentation/mid_presentation_OpenPowerlifting.pptx
+++ b/presentation/mid_presentation_OpenPowerlifting.pptx
@@ -3340,7 +3340,7 @@
                 </a:solidFill>
                 <a:latin typeface="Arial"/>
               </a:rPr>
-              <a:t>גיבוי · למה לא מבחני-נורמליות פורמליים</a:t>
+              <a:t>נספח · למה לא מבחני-נורמליות פורמליים</a:t>
             </a:r>
           </a:p>
         </p:txBody>
@@ -3423,7 +3423,7 @@
                 </a:solidFill>
                 <a:latin typeface="Arial"/>
               </a:rPr>
-              <a:t>שקף גיבוי · לא מוצג במצגת הראשית · נשלף רק לשאלה על הנחות-המודל</a:t>
+              <a:t>נספח · לא מוצג במצגת הראשית · נשלף רק לשאלה על הנחות-המודל</a:t>
             </a:r>
           </a:p>
         </p:txBody>
